--- a/PPTs/REVIEW - 1.pptx
+++ b/PPTs/REVIEW - 1.pptx
@@ -22,29 +22,15 @@
   <p:notesSz cx="8229600" cy="14630400"/>
   <p:embeddedFontLst>
     <p:embeddedFont>
-      <p:font typeface="Aldhabi" panose="01000000000000000000" pitchFamily="2" charset="-78"/>
+      <p:font typeface="Alexandria" panose="020B0604020202020204" charset="0"/>
       <p:regular r:id="rId12"/>
     </p:embeddedFont>
     <p:embeddedFont>
-      <p:font typeface="Alexandria" panose="020B0604020202020204" charset="0"/>
+      <p:font typeface="Tw Cen MT" panose="020B0602020104020603" pitchFamily="34" charset="0"/>
       <p:regular r:id="rId13"/>
-    </p:embeddedFont>
-    <p:embeddedFont>
-      <p:font typeface="Bierstadt Display" panose="020B0004020202020204" pitchFamily="34" charset="0"/>
-      <p:regular r:id="rId14"/>
-      <p:bold r:id="rId15"/>
-    </p:embeddedFont>
-    <p:embeddedFont>
-      <p:font typeface="Hadassah Friedlaender" panose="02020603050405020304" pitchFamily="18" charset="-79"/>
-      <p:regular r:id="rId16"/>
-      <p:bold r:id="rId17"/>
-    </p:embeddedFont>
-    <p:embeddedFont>
-      <p:font typeface="Tw Cen MT" panose="020B0602020104020603" pitchFamily="34" charset="0"/>
-      <p:regular r:id="rId18"/>
-      <p:bold r:id="rId19"/>
-      <p:italic r:id="rId20"/>
-      <p:boldItalic r:id="rId21"/>
+      <p:bold r:id="rId14"/>
+      <p:italic r:id="rId15"/>
+      <p:boldItalic r:id="rId16"/>
     </p:embeddedFont>
   </p:embeddedFontLst>
   <p:defaultTextStyle>
@@ -161,440 +147,30 @@
 </p:presentation>
 </file>
 
-<file path=ppt/revisionInfo.xml><?xml version="1.0" encoding="utf-8"?>
-<p1510:revInfo xmlns:a="http://schemas.openxmlformats.org/drawingml/2006/main" xmlns:r="http://schemas.openxmlformats.org/officeDocument/2006/relationships" xmlns:p1510="http://schemas.microsoft.com/office/powerpoint/2015/10/main">
-  <p1510:revLst>
-    <p1510:client id="{3202B886-3AAC-4837-8D8C-45AB0EDC4C2B}" v="38" dt="2026-08-27T15:17:08.943"/>
-  </p1510:revLst>
-</p1510:revInfo>
-</file>
-
 <file path=ppt/changesInfos/changesInfo1.xml><?xml version="1.0" encoding="utf-8"?>
 <pc:chgInfo xmlns:a="http://schemas.openxmlformats.org/drawingml/2006/main" xmlns:r="http://schemas.openxmlformats.org/officeDocument/2006/relationships" xmlns:ac="http://schemas.microsoft.com/office/drawing/2013/main/command" xmlns:pc="http://schemas.microsoft.com/office/powerpoint/2013/main/command">
   <pc:docChgLst>
-    <pc:chgData name="syam rokkam" userId="0ae24b66ee1c447d" providerId="LiveId" clId="{67F72AF4-05BD-4128-8E0A-60C42830F67D}"/>
-    <pc:docChg chg="undo redo custSel addSld delSld modSld sldOrd">
-      <pc:chgData name="syam rokkam" userId="0ae24b66ee1c447d" providerId="LiveId" clId="{67F72AF4-05BD-4128-8E0A-60C42830F67D}" dt="2026-08-27T15:20:06.236" v="793" actId="14100"/>
+    <pc:chgData name="Manoj Reddy Tetala" userId="d0a499fca1df3751" providerId="LiveId" clId="{844F9A02-E604-4125-9813-311D2C5B92A5}"/>
+    <pc:docChg chg="modSld">
+      <pc:chgData name="Manoj Reddy Tetala" userId="d0a499fca1df3751" providerId="LiveId" clId="{844F9A02-E604-4125-9813-311D2C5B92A5}" dt="2026-10-02T03:31:48.308" v="1" actId="20577"/>
       <pc:docMkLst>
         <pc:docMk/>
       </pc:docMkLst>
-      <pc:sldChg chg="addSp modSp mod">
-        <pc:chgData name="syam rokkam" userId="0ae24b66ee1c447d" providerId="LiveId" clId="{67F72AF4-05BD-4128-8E0A-60C42830F67D}" dt="2026-08-27T15:10:55.433" v="562" actId="14100"/>
-        <pc:sldMkLst>
-          <pc:docMk/>
-          <pc:sldMk cId="0" sldId="257"/>
-        </pc:sldMkLst>
-        <pc:spChg chg="add mod">
-          <ac:chgData name="syam rokkam" userId="0ae24b66ee1c447d" providerId="LiveId" clId="{67F72AF4-05BD-4128-8E0A-60C42830F67D}" dt="2026-08-27T14:44:47.530" v="209" actId="14100"/>
-          <ac:spMkLst>
-            <pc:docMk/>
-            <pc:sldMk cId="0" sldId="257"/>
-            <ac:spMk id="3" creationId="{45A09E68-0506-F82B-42D1-34A23D5AB2B8}"/>
-          </ac:spMkLst>
-        </pc:spChg>
-        <pc:spChg chg="mod">
-          <ac:chgData name="syam rokkam" userId="0ae24b66ee1c447d" providerId="LiveId" clId="{67F72AF4-05BD-4128-8E0A-60C42830F67D}" dt="2026-08-13T06:13:59.816" v="105" actId="207"/>
-          <ac:spMkLst>
-            <pc:docMk/>
-            <pc:sldMk cId="0" sldId="257"/>
-            <ac:spMk id="8" creationId="{3F176347-12E3-3164-B8FE-2BF6F113E618}"/>
-          </ac:spMkLst>
-        </pc:spChg>
-        <pc:spChg chg="mod">
-          <ac:chgData name="syam rokkam" userId="0ae24b66ee1c447d" providerId="LiveId" clId="{67F72AF4-05BD-4128-8E0A-60C42830F67D}" dt="2026-08-13T06:10:08.292" v="84" actId="1076"/>
-          <ac:spMkLst>
-            <pc:docMk/>
-            <pc:sldMk cId="0" sldId="257"/>
-            <ac:spMk id="16385" creationId="{00000000-0000-0000-0000-000000000000}"/>
-          </ac:spMkLst>
-        </pc:spChg>
-        <pc:picChg chg="mod">
-          <ac:chgData name="syam rokkam" userId="0ae24b66ee1c447d" providerId="LiveId" clId="{67F72AF4-05BD-4128-8E0A-60C42830F67D}" dt="2026-08-27T15:10:55.433" v="562" actId="14100"/>
-          <ac:picMkLst>
-            <pc:docMk/>
-            <pc:sldMk cId="0" sldId="257"/>
-            <ac:picMk id="7" creationId="{48314A47-BF3D-689D-7345-06953CF4F6B0}"/>
-          </ac:picMkLst>
-        </pc:picChg>
-      </pc:sldChg>
-      <pc:sldChg chg="addSp modSp del mod">
-        <pc:chgData name="syam rokkam" userId="0ae24b66ee1c447d" providerId="LiveId" clId="{67F72AF4-05BD-4128-8E0A-60C42830F67D}" dt="2026-08-27T14:44:31.652" v="207" actId="47"/>
-        <pc:sldMkLst>
-          <pc:docMk/>
-          <pc:sldMk cId="0" sldId="258"/>
-        </pc:sldMkLst>
-      </pc:sldChg>
-      <pc:sldChg chg="addSp delSp modSp mod">
-        <pc:chgData name="syam rokkam" userId="0ae24b66ee1c447d" providerId="LiveId" clId="{67F72AF4-05BD-4128-8E0A-60C42830F67D}" dt="2026-08-27T15:10:49.220" v="561" actId="14100"/>
-        <pc:sldMkLst>
-          <pc:docMk/>
-          <pc:sldMk cId="0" sldId="259"/>
-        </pc:sldMkLst>
-        <pc:spChg chg="add del mod">
-          <ac:chgData name="syam rokkam" userId="0ae24b66ee1c447d" providerId="LiveId" clId="{67F72AF4-05BD-4128-8E0A-60C42830F67D}" dt="2026-08-27T14:45:53.487" v="216" actId="478"/>
-          <ac:spMkLst>
-            <pc:docMk/>
-            <pc:sldMk cId="0" sldId="259"/>
-            <ac:spMk id="2" creationId="{F1B0C645-1C1B-130B-B16E-4D943B0F4B26}"/>
-          </ac:spMkLst>
-        </pc:spChg>
-        <pc:spChg chg="mod">
-          <ac:chgData name="syam rokkam" userId="0ae24b66ee1c447d" providerId="LiveId" clId="{67F72AF4-05BD-4128-8E0A-60C42830F67D}" dt="2026-08-27T14:45:09.421" v="212" actId="1076"/>
-          <ac:spMkLst>
-            <pc:docMk/>
-            <pc:sldMk cId="0" sldId="259"/>
-            <ac:spMk id="3" creationId="{CF8278B4-DF9D-881F-F08A-9F326A79CE97}"/>
-          </ac:spMkLst>
-        </pc:spChg>
-        <pc:spChg chg="add mod">
-          <ac:chgData name="syam rokkam" userId="0ae24b66ee1c447d" providerId="LiveId" clId="{67F72AF4-05BD-4128-8E0A-60C42830F67D}" dt="2026-08-27T14:46:52.159" v="226" actId="1076"/>
-          <ac:spMkLst>
-            <pc:docMk/>
-            <pc:sldMk cId="0" sldId="259"/>
-            <ac:spMk id="4" creationId="{E548EE40-2476-E73B-B6A6-E24DAF2D066B}"/>
-          </ac:spMkLst>
-        </pc:spChg>
-        <pc:picChg chg="mod">
-          <ac:chgData name="syam rokkam" userId="0ae24b66ee1c447d" providerId="LiveId" clId="{67F72AF4-05BD-4128-8E0A-60C42830F67D}" dt="2026-08-27T15:10:49.220" v="561" actId="14100"/>
-          <ac:picMkLst>
-            <pc:docMk/>
-            <pc:sldMk cId="0" sldId="259"/>
-            <ac:picMk id="22" creationId="{2F4A55A7-3D59-C616-D9BA-13970B892870}"/>
-          </ac:picMkLst>
-        </pc:picChg>
-      </pc:sldChg>
-      <pc:sldChg chg="del">
-        <pc:chgData name="syam rokkam" userId="0ae24b66ee1c447d" providerId="LiveId" clId="{67F72AF4-05BD-4128-8E0A-60C42830F67D}" dt="2026-08-27T09:41:40.239" v="170" actId="47"/>
-        <pc:sldMkLst>
-          <pc:docMk/>
-          <pc:sldMk cId="0" sldId="264"/>
-        </pc:sldMkLst>
-      </pc:sldChg>
-      <pc:sldChg chg="addSp modSp mod ord">
-        <pc:chgData name="syam rokkam" userId="0ae24b66ee1c447d" providerId="LiveId" clId="{67F72AF4-05BD-4128-8E0A-60C42830F67D}" dt="2026-08-27T15:13:19.762" v="568" actId="20578"/>
-        <pc:sldMkLst>
-          <pc:docMk/>
-          <pc:sldMk cId="0" sldId="266"/>
-        </pc:sldMkLst>
-        <pc:spChg chg="add mod">
-          <ac:chgData name="syam rokkam" userId="0ae24b66ee1c447d" providerId="LiveId" clId="{67F72AF4-05BD-4128-8E0A-60C42830F67D}" dt="2026-08-27T14:43:12.779" v="203" actId="1076"/>
-          <ac:spMkLst>
-            <pc:docMk/>
-            <pc:sldMk cId="0" sldId="266"/>
-            <ac:spMk id="2" creationId="{CDF3E7B3-D0FF-ADFE-7783-43E21B149B71}"/>
-          </ac:spMkLst>
-        </pc:spChg>
-        <pc:spChg chg="mod">
-          <ac:chgData name="syam rokkam" userId="0ae24b66ee1c447d" providerId="LiveId" clId="{67F72AF4-05BD-4128-8E0A-60C42830F67D}" dt="2026-08-27T14:50:08.172" v="259" actId="1076"/>
-          <ac:spMkLst>
-            <pc:docMk/>
-            <pc:sldMk cId="0" sldId="266"/>
-            <ac:spMk id="30721" creationId="{00000000-0000-0000-0000-000000000000}"/>
-          </ac:spMkLst>
-        </pc:spChg>
-        <pc:picChg chg="mod">
-          <ac:chgData name="syam rokkam" userId="0ae24b66ee1c447d" providerId="LiveId" clId="{67F72AF4-05BD-4128-8E0A-60C42830F67D}" dt="2026-08-27T15:10:41.707" v="560" actId="14100"/>
-          <ac:picMkLst>
-            <pc:docMk/>
-            <pc:sldMk cId="0" sldId="266"/>
-            <ac:picMk id="3" creationId="{7FD8BA79-AFCD-8317-CA0C-9FA4C3CCDBC9}"/>
-          </ac:picMkLst>
-        </pc:picChg>
-      </pc:sldChg>
-      <pc:sldChg chg="addSp delSp modSp mod ord">
-        <pc:chgData name="syam rokkam" userId="0ae24b66ee1c447d" providerId="LiveId" clId="{67F72AF4-05BD-4128-8E0A-60C42830F67D}" dt="2026-08-27T15:15:27.667" v="612" actId="1076"/>
+      <pc:sldChg chg="modSp mod">
+        <pc:chgData name="Manoj Reddy Tetala" userId="d0a499fca1df3751" providerId="LiveId" clId="{844F9A02-E604-4125-9813-311D2C5B92A5}" dt="2026-10-02T03:31:48.308" v="1" actId="20577"/>
         <pc:sldMkLst>
           <pc:docMk/>
           <pc:sldMk cId="0" sldId="268"/>
         </pc:sldMkLst>
-        <pc:spChg chg="add del">
-          <ac:chgData name="syam rokkam" userId="0ae24b66ee1c447d" providerId="LiveId" clId="{67F72AF4-05BD-4128-8E0A-60C42830F67D}" dt="2026-08-27T15:01:06.516" v="388" actId="478"/>
+        <pc:spChg chg="mod">
+          <ac:chgData name="Manoj Reddy Tetala" userId="d0a499fca1df3751" providerId="LiveId" clId="{844F9A02-E604-4125-9813-311D2C5B92A5}" dt="2026-10-02T03:31:48.308" v="1" actId="20577"/>
           <ac:spMkLst>
             <pc:docMk/>
             <pc:sldMk cId="0" sldId="268"/>
-            <ac:spMk id="2" creationId="{00000000-0000-0000-0000-000000000000}"/>
-          </ac:spMkLst>
-        </pc:spChg>
-        <pc:spChg chg="add mod">
-          <ac:chgData name="syam rokkam" userId="0ae24b66ee1c447d" providerId="LiveId" clId="{67F72AF4-05BD-4128-8E0A-60C42830F67D}" dt="2026-08-27T15:15:23.356" v="611" actId="1076"/>
-          <ac:spMkLst>
-            <pc:docMk/>
-            <pc:sldMk cId="0" sldId="268"/>
-            <ac:spMk id="3" creationId="{66768281-B6D2-4D02-3425-EE4920793F9B}"/>
-          </ac:spMkLst>
-        </pc:spChg>
-        <pc:spChg chg="add del mod">
-          <ac:chgData name="syam rokkam" userId="0ae24b66ee1c447d" providerId="LiveId" clId="{67F72AF4-05BD-4128-8E0A-60C42830F67D}" dt="2026-08-27T15:15:27.667" v="612" actId="1076"/>
-          <ac:spMkLst>
-            <pc:docMk/>
-            <pc:sldMk cId="0" sldId="268"/>
-            <ac:spMk id="39" creationId="{2A147B0D-FA0F-5B3A-6E0E-25A804852853}"/>
-          </ac:spMkLst>
-        </pc:spChg>
-        <pc:picChg chg="add del mod">
-          <ac:chgData name="syam rokkam" userId="0ae24b66ee1c447d" providerId="LiveId" clId="{67F72AF4-05BD-4128-8E0A-60C42830F67D}" dt="2026-08-27T15:10:36.106" v="559" actId="14100"/>
-          <ac:picMkLst>
-            <pc:docMk/>
-            <pc:sldMk cId="0" sldId="268"/>
-            <ac:picMk id="40" creationId="{CB1C515D-E08C-B48F-D9FC-A01A6DB8FA56}"/>
-          </ac:picMkLst>
-        </pc:picChg>
-      </pc:sldChg>
-      <pc:sldChg chg="del">
-        <pc:chgData name="syam rokkam" userId="0ae24b66ee1c447d" providerId="LiveId" clId="{67F72AF4-05BD-4128-8E0A-60C42830F67D}" dt="2026-08-27T09:41:35.934" v="169" actId="47"/>
-        <pc:sldMkLst>
-          <pc:docMk/>
-          <pc:sldMk cId="0" sldId="271"/>
-        </pc:sldMkLst>
-      </pc:sldChg>
-      <pc:sldChg chg="addSp delSp modSp del mod">
-        <pc:chgData name="syam rokkam" userId="0ae24b66ee1c447d" providerId="LiveId" clId="{67F72AF4-05BD-4128-8E0A-60C42830F67D}" dt="2026-08-27T09:42:01.871" v="171" actId="47"/>
-        <pc:sldMkLst>
-          <pc:docMk/>
-          <pc:sldMk cId="1554513561" sldId="274"/>
-        </pc:sldMkLst>
-      </pc:sldChg>
-      <pc:sldChg chg="addSp delSp modSp mod">
-        <pc:chgData name="syam rokkam" userId="0ae24b66ee1c447d" providerId="LiveId" clId="{67F72AF4-05BD-4128-8E0A-60C42830F67D}" dt="2026-08-27T15:19:42.451" v="791" actId="20577"/>
-        <pc:sldMkLst>
-          <pc:docMk/>
-          <pc:sldMk cId="2080998566" sldId="297"/>
-        </pc:sldMkLst>
-        <pc:spChg chg="mod">
-          <ac:chgData name="syam rokkam" userId="0ae24b66ee1c447d" providerId="LiveId" clId="{67F72AF4-05BD-4128-8E0A-60C42830F67D}" dt="2026-08-13T06:06:53.579" v="4" actId="1076"/>
-          <ac:spMkLst>
-            <pc:docMk/>
-            <pc:sldMk cId="2080998566" sldId="297"/>
-            <ac:spMk id="2" creationId="{9762C6C0-94B4-71A3-0F3D-4E8331F73B7E}"/>
-          </ac:spMkLst>
-        </pc:spChg>
-        <pc:spChg chg="del mod">
-          <ac:chgData name="syam rokkam" userId="0ae24b66ee1c447d" providerId="LiveId" clId="{67F72AF4-05BD-4128-8E0A-60C42830F67D}" dt="2026-08-27T15:15:58.906" v="616" actId="478"/>
-          <ac:spMkLst>
-            <pc:docMk/>
-            <pc:sldMk cId="2080998566" sldId="297"/>
-            <ac:spMk id="3" creationId="{7A0B7B96-3192-9FD1-EFE0-0F9EDAF2F990}"/>
-          </ac:spMkLst>
-        </pc:spChg>
-        <pc:spChg chg="mod">
-          <ac:chgData name="syam rokkam" userId="0ae24b66ee1c447d" providerId="LiveId" clId="{67F72AF4-05BD-4128-8E0A-60C42830F67D}" dt="2026-08-27T15:19:42.451" v="791" actId="20577"/>
-          <ac:spMkLst>
-            <pc:docMk/>
-            <pc:sldMk cId="2080998566" sldId="297"/>
-            <ac:spMk id="4" creationId="{EFEE904A-D8B2-E5A2-8205-6A52D22853B0}"/>
-          </ac:spMkLst>
-        </pc:spChg>
-        <pc:spChg chg="add mod">
-          <ac:chgData name="syam rokkam" userId="0ae24b66ee1c447d" providerId="LiveId" clId="{67F72AF4-05BD-4128-8E0A-60C42830F67D}" dt="2026-08-27T15:19:15.682" v="788" actId="1076"/>
-          <ac:spMkLst>
-            <pc:docMk/>
-            <pc:sldMk cId="2080998566" sldId="297"/>
-            <ac:spMk id="6" creationId="{9020B21A-81DF-6426-97CA-6EE48FB26AC6}"/>
-          </ac:spMkLst>
-        </pc:spChg>
-        <pc:spChg chg="add del mod">
-          <ac:chgData name="syam rokkam" userId="0ae24b66ee1c447d" providerId="LiveId" clId="{67F72AF4-05BD-4128-8E0A-60C42830F67D}" dt="2026-08-13T06:09:36.562" v="81" actId="1076"/>
-          <ac:spMkLst>
-            <pc:docMk/>
-            <pc:sldMk cId="2080998566" sldId="297"/>
-            <ac:spMk id="8" creationId="{4C76C072-E379-8708-2AF2-93DD1B340BC6}"/>
+            <ac:spMk id="6" creationId="{980F0D27-279D-4552-AF33-4C278AD7478C}"/>
           </ac:spMkLst>
         </pc:spChg>
       </pc:sldChg>
-      <pc:sldChg chg="modSp mod">
-        <pc:chgData name="syam rokkam" userId="0ae24b66ee1c447d" providerId="LiveId" clId="{67F72AF4-05BD-4128-8E0A-60C42830F67D}" dt="2026-08-13T06:20:29.909" v="149" actId="1076"/>
-        <pc:sldMkLst>
-          <pc:docMk/>
-          <pc:sldMk cId="936524495" sldId="300"/>
-        </pc:sldMkLst>
-        <pc:spChg chg="mod">
-          <ac:chgData name="syam rokkam" userId="0ae24b66ee1c447d" providerId="LiveId" clId="{67F72AF4-05BD-4128-8E0A-60C42830F67D}" dt="2026-08-13T06:20:29.909" v="149" actId="1076"/>
-          <ac:spMkLst>
-            <pc:docMk/>
-            <pc:sldMk cId="936524495" sldId="300"/>
-            <ac:spMk id="2" creationId="{597A951F-4961-566F-893B-B3FFA9C11CD4}"/>
-          </ac:spMkLst>
-        </pc:spChg>
-      </pc:sldChg>
-      <pc:sldChg chg="addSp delSp modSp new mod">
-        <pc:chgData name="syam rokkam" userId="0ae24b66ee1c447d" providerId="LiveId" clId="{67F72AF4-05BD-4128-8E0A-60C42830F67D}" dt="2026-08-27T15:10:16.500" v="558" actId="14100"/>
-        <pc:sldMkLst>
-          <pc:docMk/>
-          <pc:sldMk cId="2897778751" sldId="301"/>
-        </pc:sldMkLst>
-        <pc:spChg chg="add del mod">
-          <ac:chgData name="syam rokkam" userId="0ae24b66ee1c447d" providerId="LiveId" clId="{67F72AF4-05BD-4128-8E0A-60C42830F67D}" dt="2026-08-27T14:49:38.197" v="248" actId="478"/>
-          <ac:spMkLst>
-            <pc:docMk/>
-            <pc:sldMk cId="2897778751" sldId="301"/>
-            <ac:spMk id="4" creationId="{F4C25A88-1C84-E6A3-BD0C-5DB4C09B2458}"/>
-          </ac:spMkLst>
-        </pc:spChg>
-        <pc:spChg chg="add del mod">
-          <ac:chgData name="syam rokkam" userId="0ae24b66ee1c447d" providerId="LiveId" clId="{67F72AF4-05BD-4128-8E0A-60C42830F67D}" dt="2026-08-27T14:49:49.781" v="253"/>
-          <ac:spMkLst>
-            <pc:docMk/>
-            <pc:sldMk cId="2897778751" sldId="301"/>
-            <ac:spMk id="5" creationId="{4B0AA083-86AC-7245-6F16-133CD4B29A99}"/>
-          </ac:spMkLst>
-        </pc:spChg>
-        <pc:spChg chg="add del mod">
-          <ac:chgData name="syam rokkam" userId="0ae24b66ee1c447d" providerId="LiveId" clId="{67F72AF4-05BD-4128-8E0A-60C42830F67D}" dt="2026-08-27T14:50:02.187" v="258"/>
-          <ac:spMkLst>
-            <pc:docMk/>
-            <pc:sldMk cId="2897778751" sldId="301"/>
-            <ac:spMk id="6" creationId="{2682C2A1-AD69-6811-1FB7-F5E800B8BE83}"/>
-          </ac:spMkLst>
-        </pc:spChg>
-        <pc:spChg chg="add mod">
-          <ac:chgData name="syam rokkam" userId="0ae24b66ee1c447d" providerId="LiveId" clId="{67F72AF4-05BD-4128-8E0A-60C42830F67D}" dt="2026-08-27T15:02:30.205" v="454" actId="20577"/>
-          <ac:spMkLst>
-            <pc:docMk/>
-            <pc:sldMk cId="2897778751" sldId="301"/>
-            <ac:spMk id="7" creationId="{26992B14-FE43-2079-7915-EF47D7062A7B}"/>
-          </ac:spMkLst>
-        </pc:spChg>
-        <pc:spChg chg="add mod">
-          <ac:chgData name="syam rokkam" userId="0ae24b66ee1c447d" providerId="LiveId" clId="{67F72AF4-05BD-4128-8E0A-60C42830F67D}" dt="2026-08-27T15:04:30.190" v="484" actId="1076"/>
-          <ac:spMkLst>
-            <pc:docMk/>
-            <pc:sldMk cId="2897778751" sldId="301"/>
-            <ac:spMk id="8" creationId="{76839F58-A412-AAD3-1955-35EF9731CD87}"/>
-          </ac:spMkLst>
-        </pc:spChg>
-        <pc:picChg chg="add mod">
-          <ac:chgData name="syam rokkam" userId="0ae24b66ee1c447d" providerId="LiveId" clId="{67F72AF4-05BD-4128-8E0A-60C42830F67D}" dt="2026-08-27T15:10:16.500" v="558" actId="14100"/>
-          <ac:picMkLst>
-            <pc:docMk/>
-            <pc:sldMk cId="2897778751" sldId="301"/>
-            <ac:picMk id="3" creationId="{24BB2F37-8732-2CB0-7E49-2A672476D591}"/>
-          </ac:picMkLst>
-        </pc:picChg>
-      </pc:sldChg>
-      <pc:sldChg chg="addSp delSp modSp new mod">
-        <pc:chgData name="syam rokkam" userId="0ae24b66ee1c447d" providerId="LiveId" clId="{67F72AF4-05BD-4128-8E0A-60C42830F67D}" dt="2026-08-27T15:20:06.236" v="793" actId="14100"/>
-        <pc:sldMkLst>
-          <pc:docMk/>
-          <pc:sldMk cId="2057362345" sldId="302"/>
-        </pc:sldMkLst>
-        <pc:spChg chg="add del mod">
-          <ac:chgData name="syam rokkam" userId="0ae24b66ee1c447d" providerId="LiveId" clId="{67F72AF4-05BD-4128-8E0A-60C42830F67D}" dt="2026-08-27T14:54:41.015" v="313" actId="478"/>
-          <ac:spMkLst>
-            <pc:docMk/>
-            <pc:sldMk cId="2057362345" sldId="302"/>
-            <ac:spMk id="4" creationId="{7E1735B2-4B8D-454B-B4F3-6DF48A205E41}"/>
-          </ac:spMkLst>
-        </pc:spChg>
-        <pc:spChg chg="add del mod">
-          <ac:chgData name="syam rokkam" userId="0ae24b66ee1c447d" providerId="LiveId" clId="{67F72AF4-05BD-4128-8E0A-60C42830F67D}" dt="2026-08-27T14:54:50.239" v="318"/>
-          <ac:spMkLst>
-            <pc:docMk/>
-            <pc:sldMk cId="2057362345" sldId="302"/>
-            <ac:spMk id="5" creationId="{AA1917B5-9494-5031-A11B-D996A2E81180}"/>
-          </ac:spMkLst>
-        </pc:spChg>
-        <pc:spChg chg="add mod">
-          <ac:chgData name="syam rokkam" userId="0ae24b66ee1c447d" providerId="LiveId" clId="{67F72AF4-05BD-4128-8E0A-60C42830F67D}" dt="2026-08-27T15:03:07.423" v="475" actId="255"/>
-          <ac:spMkLst>
-            <pc:docMk/>
-            <pc:sldMk cId="2057362345" sldId="302"/>
-            <ac:spMk id="6" creationId="{0EEFE58F-1ED8-2F63-73D8-3EC94051D967}"/>
-          </ac:spMkLst>
-        </pc:spChg>
-        <pc:spChg chg="add mod">
-          <ac:chgData name="syam rokkam" userId="0ae24b66ee1c447d" providerId="LiveId" clId="{67F72AF4-05BD-4128-8E0A-60C42830F67D}" dt="2026-08-27T14:59:18.923" v="384" actId="1076"/>
-          <ac:spMkLst>
-            <pc:docMk/>
-            <pc:sldMk cId="2057362345" sldId="302"/>
-            <ac:spMk id="7" creationId="{8A87A169-B4E5-F934-E53B-8A52491D7B19}"/>
-          </ac:spMkLst>
-        </pc:spChg>
-        <pc:picChg chg="add mod">
-          <ac:chgData name="syam rokkam" userId="0ae24b66ee1c447d" providerId="LiveId" clId="{67F72AF4-05BD-4128-8E0A-60C42830F67D}" dt="2026-08-27T15:20:06.236" v="793" actId="14100"/>
-          <ac:picMkLst>
-            <pc:docMk/>
-            <pc:sldMk cId="2057362345" sldId="302"/>
-            <ac:picMk id="3" creationId="{0698359C-577A-79A2-D8E1-10EB4125EE13}"/>
-          </ac:picMkLst>
-        </pc:picChg>
-      </pc:sldChg>
-      <pc:sldChg chg="addSp delSp modSp new mod">
-        <pc:chgData name="syam rokkam" userId="0ae24b66ee1c447d" providerId="LiveId" clId="{67F72AF4-05BD-4128-8E0A-60C42830F67D}" dt="2026-08-27T15:11:17.185" v="565" actId="14100"/>
-        <pc:sldMkLst>
-          <pc:docMk/>
-          <pc:sldMk cId="2201850321" sldId="303"/>
-        </pc:sldMkLst>
-        <pc:spChg chg="add mod">
-          <ac:chgData name="syam rokkam" userId="0ae24b66ee1c447d" providerId="LiveId" clId="{67F72AF4-05BD-4128-8E0A-60C42830F67D}" dt="2026-08-27T15:09:52.411" v="554" actId="1076"/>
-          <ac:spMkLst>
-            <pc:docMk/>
-            <pc:sldMk cId="2201850321" sldId="303"/>
-            <ac:spMk id="4" creationId="{71B39239-0D06-BDF5-9DB5-C9BE9FE83B64}"/>
-          </ac:spMkLst>
-        </pc:spChg>
-        <pc:spChg chg="add mod">
-          <ac:chgData name="syam rokkam" userId="0ae24b66ee1c447d" providerId="LiveId" clId="{67F72AF4-05BD-4128-8E0A-60C42830F67D}" dt="2026-08-27T15:09:47.651" v="553" actId="1076"/>
-          <ac:spMkLst>
-            <pc:docMk/>
-            <pc:sldMk cId="2201850321" sldId="303"/>
-            <ac:spMk id="5" creationId="{B751CE9F-06C5-3DD3-A845-0870661A6794}"/>
-          </ac:spMkLst>
-        </pc:spChg>
-        <pc:picChg chg="add del mod">
-          <ac:chgData name="syam rokkam" userId="0ae24b66ee1c447d" providerId="LiveId" clId="{67F72AF4-05BD-4128-8E0A-60C42830F67D}" dt="2026-08-27T15:11:17.185" v="565" actId="14100"/>
-          <ac:picMkLst>
-            <pc:docMk/>
-            <pc:sldMk cId="2201850321" sldId="303"/>
-            <ac:picMk id="3" creationId="{DF907681-9FEE-A50D-6C51-731E4C0CB87F}"/>
-          </ac:picMkLst>
-        </pc:picChg>
-      </pc:sldChg>
-      <pc:sldChg chg="addSp modSp new mod">
-        <pc:chgData name="syam rokkam" userId="0ae24b66ee1c447d" providerId="LiveId" clId="{67F72AF4-05BD-4128-8E0A-60C42830F67D}" dt="2026-08-27T15:11:09.130" v="563" actId="14100"/>
-        <pc:sldMkLst>
-          <pc:docMk/>
-          <pc:sldMk cId="1944993390" sldId="304"/>
-        </pc:sldMkLst>
-        <pc:spChg chg="add mod">
-          <ac:chgData name="syam rokkam" userId="0ae24b66ee1c447d" providerId="LiveId" clId="{67F72AF4-05BD-4128-8E0A-60C42830F67D}" dt="2026-08-27T15:09:35.131" v="551" actId="1076"/>
-          <ac:spMkLst>
-            <pc:docMk/>
-            <pc:sldMk cId="1944993390" sldId="304"/>
-            <ac:spMk id="4" creationId="{503DD249-DD41-2B0F-2BCC-8F44FE10885A}"/>
-          </ac:spMkLst>
-        </pc:spChg>
-        <pc:spChg chg="add mod">
-          <ac:chgData name="syam rokkam" userId="0ae24b66ee1c447d" providerId="LiveId" clId="{67F72AF4-05BD-4128-8E0A-60C42830F67D}" dt="2026-08-27T15:09:28.327" v="550" actId="1076"/>
-          <ac:spMkLst>
-            <pc:docMk/>
-            <pc:sldMk cId="1944993390" sldId="304"/>
-            <ac:spMk id="5" creationId="{62C724BB-4343-FFA9-129E-92988759CA8B}"/>
-          </ac:spMkLst>
-        </pc:spChg>
-        <pc:picChg chg="add mod">
-          <ac:chgData name="syam rokkam" userId="0ae24b66ee1c447d" providerId="LiveId" clId="{67F72AF4-05BD-4128-8E0A-60C42830F67D}" dt="2026-08-27T15:11:09.130" v="563" actId="14100"/>
-          <ac:picMkLst>
-            <pc:docMk/>
-            <pc:sldMk cId="1944993390" sldId="304"/>
-            <ac:picMk id="3" creationId="{78124992-BFFD-E9CC-0FDB-20C8069A91BA}"/>
-          </ac:picMkLst>
-        </pc:picChg>
-      </pc:sldChg>
-      <pc:sldMasterChg chg="delSldLayout">
-        <pc:chgData name="syam rokkam" userId="0ae24b66ee1c447d" providerId="LiveId" clId="{67F72AF4-05BD-4128-8E0A-60C42830F67D}" dt="2026-08-27T14:44:31.652" v="207" actId="47"/>
-        <pc:sldMasterMkLst>
-          <pc:docMk/>
-          <pc:sldMasterMk cId="0" sldId="2147483658"/>
-        </pc:sldMasterMkLst>
-        <pc:sldLayoutChg chg="del">
-          <pc:chgData name="syam rokkam" userId="0ae24b66ee1c447d" providerId="LiveId" clId="{67F72AF4-05BD-4128-8E0A-60C42830F67D}" dt="2026-08-27T14:44:31.652" v="207" actId="47"/>
-          <pc:sldLayoutMkLst>
-            <pc:docMk/>
-            <pc:sldMasterMk cId="0" sldId="2147483658"/>
-            <pc:sldLayoutMk cId="0" sldId="2147483671"/>
-          </pc:sldLayoutMkLst>
-        </pc:sldLayoutChg>
-      </pc:sldMasterChg>
     </pc:docChg>
   </pc:docChgLst>
 </pc:chgInfo>
@@ -4254,7 +3830,7 @@
               <a:buNone/>
             </a:pPr>
             <a:r>
-              <a:rPr lang="en-US" b="1" dirty="0" sz="2400">
+              <a:rPr lang="en-US" sz="2400" b="1" dirty="0">
                 <a:solidFill>
                   <a:schemeClr val="tx1">
                     <a:lumMod val="95000"/>
@@ -4265,7 +3841,7 @@
               <a:t>P</a:t>
             </a:r>
             <a:r>
-              <a:rPr lang="en-IN" b="1" dirty="0" sz="2400">
+              <a:rPr lang="en-IN" sz="2400" b="1" dirty="0">
                 <a:solidFill>
                   <a:schemeClr val="tx1">
                     <a:lumMod val="95000"/>
@@ -4323,7 +3899,7 @@
               </a:tabLst>
             </a:pPr>
             <a:r>
-              <a:rPr lang="en-IN" b="1" dirty="0" sz="2400"/>
+              <a:rPr lang="en-IN" sz="2400" b="1" dirty="0"/>
               <a:t>1. T . Manoj Reddy	- 25B11CS946</a:t>
             </a:r>
           </a:p>
@@ -4345,10 +3921,10 @@
               </a:tabLst>
             </a:pPr>
             <a:r>
-              <a:rPr lang="en-IN" b="1" dirty="0" sz="2400"/>
+              <a:rPr lang="en-IN" sz="2400" b="1" dirty="0"/>
               <a:t>2. K . Sri Sai Surya Manikanta	- 25B11CS002</a:t>
             </a:r>
-            <a:endParaRPr lang="en-IN" dirty="0" sz="2400"/>
+            <a:endParaRPr lang="en-IN" sz="2400" dirty="0"/>
           </a:p>
           <a:p>
             <a:pPr marL="457200" indent="-457200" algn="l">
@@ -4368,7 +3944,7 @@
               </a:tabLst>
             </a:pPr>
             <a:r>
-              <a:rPr lang="en-IN" b="1" dirty="0" sz="2400"/>
+              <a:rPr lang="en-IN" sz="2400" b="1" dirty="0"/>
               <a:t>3. Sana Jaswanthi	- 25B11CS845</a:t>
             </a:r>
           </a:p>
@@ -4390,10 +3966,10 @@
               </a:tabLst>
             </a:pPr>
             <a:r>
-              <a:rPr lang="en-IN" b="1" dirty="0" sz="2400"/>
+              <a:rPr lang="en-IN" sz="2400" b="1" dirty="0"/>
               <a:t>4. A . Divija Naga Sai Teja Sri	- 25B11CS005</a:t>
             </a:r>
-            <a:endParaRPr lang="en-IN" dirty="0" sz="2400"/>
+            <a:endParaRPr lang="en-IN" sz="2400" dirty="0"/>
           </a:p>
         </p:txBody>
       </p:sp>
@@ -4435,7 +4011,7 @@
               <a:buNone/>
             </a:pPr>
             <a:r>
-              <a:rPr lang="en-US" sz="3200" dirty="0" b="1">
+              <a:rPr lang="en-US" sz="3200" b="1" dirty="0">
                 <a:solidFill>
                   <a:srgbClr val="FF0000"/>
                 </a:solidFill>
@@ -4606,7 +4182,7 @@
           </a:bodyPr>
           <a:lstStyle/>
           <a:p>
-            <a:pPr lvl="0" marL="0" indent="0" algn="just">
+            <a:pPr marL="0" lvl="0" indent="0" algn="just">
               <a:lnSpc>
                 <a:spcPct val="110000"/>
               </a:lnSpc>
@@ -4630,7 +4206,7 @@
               <a:rPr lang="en-US" sz="3000" dirty="0"/>
               <a:t> dataset using data analytics techniques to study transaction patterns, merchant category spending, bank-wise transaction distribution, regional payment trends, transaction success rates, and fraud occurrences. The insights generated help transform raw transaction data into meaningful business information that supports informed decision-making.</a:t>
             </a:r>
-            <a:endParaRPr lang="en-IN" dirty="0" sz="3000"/>
+            <a:endParaRPr lang="en-IN" sz="3000" dirty="0"/>
           </a:p>
         </p:txBody>
       </p:sp>
@@ -4757,10 +4333,10 @@
           <a:p>
             <a:pPr algn="r"/>
             <a:fld id="{326EF2E3-409D-4D76-AD02-397A36B0DAF9}" type="slidenum">
-              <a:rPr lang="en-US" smtClean="0" sz="1600"/>
+              <a:rPr lang="en-US" sz="1600" smtClean="0"/>
               <a:t>2</a:t>
             </a:fld>
-            <a:endParaRPr lang="en-US" dirty="0" sz="1600"/>
+            <a:endParaRPr lang="en-US" sz="1600" dirty="0"/>
           </a:p>
         </p:txBody>
       </p:sp>
@@ -4901,7 +4477,7 @@
           </a:bodyPr>
           <a:lstStyle/>
           <a:p>
-            <a:pPr lvl="0" marL="457200" indent="-457200" algn="l">
+            <a:pPr marL="457200" lvl="0" indent="-457200" algn="l">
               <a:lnSpc>
                 <a:spcPct val="100000"/>
               </a:lnSpc>
@@ -4920,7 +4496,7 @@
             </a:r>
           </a:p>
           <a:p>
-            <a:pPr lvl="0" marL="457200" indent="-457200" algn="l">
+            <a:pPr marL="457200" lvl="0" indent="-457200" algn="l">
               <a:lnSpc>
                 <a:spcPct val="100000"/>
               </a:lnSpc>
@@ -4939,7 +4515,7 @@
             </a:r>
           </a:p>
           <a:p>
-            <a:pPr lvl="0" marL="457200" indent="-457200" algn="l">
+            <a:pPr marL="457200" lvl="0" indent="-457200" algn="l">
               <a:lnSpc>
                 <a:spcPct val="100000"/>
               </a:lnSpc>
@@ -4958,7 +4534,7 @@
             </a:r>
           </a:p>
           <a:p>
-            <a:pPr lvl="0" marL="457200" indent="-457200" algn="l">
+            <a:pPr marL="457200" lvl="0" indent="-457200" algn="l">
               <a:lnSpc>
                 <a:spcPct val="100000"/>
               </a:lnSpc>
@@ -4977,7 +4553,7 @@
             </a:r>
           </a:p>
           <a:p>
-            <a:pPr lvl="0" marL="457200" indent="-457200" algn="l">
+            <a:pPr marL="457200" lvl="0" indent="-457200" algn="l">
               <a:lnSpc>
                 <a:spcPct val="100000"/>
               </a:lnSpc>
@@ -4996,7 +4572,7 @@
             </a:r>
           </a:p>
           <a:p>
-            <a:pPr lvl="0" marL="457200" indent="-457200" algn="l">
+            <a:pPr marL="457200" lvl="0" indent="-457200" algn="l">
               <a:lnSpc>
                 <a:spcPct val="100000"/>
               </a:lnSpc>
@@ -5230,7 +4806,7 @@
         <p:spPr>
           <a:xfrm>
             <a:off x="1000000" y="1450000"/>
-            <a:ext cx="12630400" cy="5800000"/>
+            <a:ext cx="12630400" cy="5791329"/>
           </a:xfrm>
           <a:prstGeom prst="rect">
             <a:avLst/>
@@ -5243,7 +4819,7 @@
           </a:bodyPr>
           <a:lstStyle/>
           <a:p>
-            <a:pPr lvl="0" marL="457200" indent="-457200" algn="l">
+            <a:pPr marL="457200" lvl="0" indent="-457200" algn="l">
               <a:lnSpc>
                 <a:spcPct val="100000"/>
               </a:lnSpc>
@@ -5266,7 +4842,7 @@
             </a:r>
           </a:p>
           <a:p>
-            <a:pPr lvl="0" marL="457200" indent="-457200" algn="l">
+            <a:pPr marL="457200" lvl="0" indent="-457200" algn="l">
               <a:lnSpc>
                 <a:spcPct val="100000"/>
               </a:lnSpc>
@@ -5293,11 +4869,23 @@
             </a:r>
             <a:r>
               <a:rPr lang="en-US" sz="2600" dirty="0"/>
-              <a:t> with </a:t>
+              <a:t> </a:t>
+            </a:r>
+            <a:r>
+              <a:rPr lang="en-US" sz="2600"/>
+              <a:t>with </a:t>
             </a:r>
             <a:r>
               <a:rPr lang="en-US" sz="2600" b="1" dirty="0"/>
-              <a:t>17 attributes</a:t>
+              <a:t>2</a:t>
+            </a:r>
+            <a:r>
+              <a:rPr lang="en-US" sz="2600" b="1"/>
+              <a:t>7 </a:t>
+            </a:r>
+            <a:r>
+              <a:rPr lang="en-US" sz="2600" b="1" dirty="0"/>
+              <a:t>attributes</a:t>
             </a:r>
             <a:r>
               <a:rPr lang="en-US" sz="2600" dirty="0"/>
@@ -5305,7 +4893,7 @@
             </a:r>
           </a:p>
           <a:p>
-            <a:pPr lvl="0" marL="457200" indent="-457200" algn="l">
+            <a:pPr marL="457200" lvl="0" indent="-457200" algn="l">
               <a:lnSpc>
                 <a:spcPct val="100000"/>
               </a:lnSpc>
@@ -5328,7 +4916,7 @@
             </a:r>
           </a:p>
           <a:p>
-            <a:pPr lvl="0" marL="457200" indent="-457200" algn="l">
+            <a:pPr marL="457200" lvl="0" indent="-457200" algn="l">
               <a:lnSpc>
                 <a:spcPct val="100000"/>
               </a:lnSpc>
@@ -5351,7 +4939,7 @@
             </a:r>
           </a:p>
           <a:p>
-            <a:pPr lvl="0" marL="457200" indent="-457200" algn="l">
+            <a:pPr marL="457200" lvl="0" indent="-457200" algn="l">
               <a:lnSpc>
                 <a:spcPct val="100000"/>
               </a:lnSpc>
@@ -5374,7 +4962,7 @@
             </a:r>
           </a:p>
           <a:p>
-            <a:pPr lvl="0" marL="457200" indent="-457200" algn="l">
+            <a:pPr marL="457200" lvl="0" indent="-457200" algn="l">
               <a:lnSpc>
                 <a:spcPct val="100000"/>
               </a:lnSpc>
@@ -5397,7 +4985,7 @@
             </a:r>
           </a:p>
           <a:p>
-            <a:pPr lvl="0" marL="457200" indent="-457200" algn="l">
+            <a:pPr marL="457200" lvl="0" indent="-457200" algn="l">
               <a:lnSpc>
                 <a:spcPct val="100000"/>
               </a:lnSpc>
@@ -5420,7 +5008,7 @@
             </a:r>
           </a:p>
           <a:p>
-            <a:pPr lvl="0" marL="457200" indent="-457200" algn="l">
+            <a:pPr marL="457200" lvl="0" indent="-457200" algn="l">
               <a:lnSpc>
                 <a:spcPct val="100000"/>
               </a:lnSpc>
@@ -5592,10 +5180,10 @@
           <a:p>
             <a:pPr algn="r"/>
             <a:fld id="{326EF2E3-409D-4D76-AD02-397A36B0DAF9}" type="slidenum">
-              <a:rPr lang="en-US" smtClean="0" sz="1600"/>
+              <a:rPr lang="en-US" sz="1600" smtClean="0"/>
               <a:t>5</a:t>
             </a:fld>
-            <a:endParaRPr lang="en-US" dirty="0" sz="1600"/>
+            <a:endParaRPr lang="en-US" sz="1600" dirty="0"/>
           </a:p>
         </p:txBody>
       </p:sp>
@@ -5644,11 +5232,6 @@
               </a:rPr>
               <a:t>System Requirements</a:t>
             </a:r>
-            <a:endParaRPr lang="en-IN" sz="4400" b="1" dirty="0">
-              <a:solidFill>
-                <a:schemeClr val="accent2"/>
-              </a:solidFill>
-            </a:endParaRPr>
           </a:p>
         </p:txBody>
       </p:sp>
@@ -5698,7 +5281,7 @@
             </a:r>
           </a:p>
           <a:p>
-            <a:pPr lvl="0" marL="457200" indent="0" algn="l">
+            <a:pPr marL="457200" lvl="0" indent="0" algn="l">
               <a:lnSpc>
                 <a:spcPct val="90000"/>
               </a:lnSpc>
@@ -5716,7 +5299,7 @@
             </a:r>
           </a:p>
           <a:p>
-            <a:pPr lvl="0" marL="457200" indent="0" algn="l">
+            <a:pPr marL="457200" lvl="0" indent="0" algn="l">
               <a:lnSpc>
                 <a:spcPct val="90000"/>
               </a:lnSpc>
@@ -5734,7 +5317,7 @@
             </a:r>
           </a:p>
           <a:p>
-            <a:pPr lvl="0" marL="457200" indent="0" algn="l">
+            <a:pPr marL="457200" lvl="0" indent="0" algn="l">
               <a:lnSpc>
                 <a:spcPct val="90000"/>
               </a:lnSpc>
@@ -5752,7 +5335,7 @@
             </a:r>
           </a:p>
           <a:p>
-            <a:pPr lvl="0" marL="457200" indent="0" algn="l">
+            <a:pPr marL="457200" lvl="0" indent="0" algn="l">
               <a:lnSpc>
                 <a:spcPct val="90000"/>
               </a:lnSpc>
@@ -5788,7 +5371,7 @@
             </a:r>
           </a:p>
           <a:p>
-            <a:pPr lvl="0" marL="457200" indent="0" algn="l">
+            <a:pPr marL="457200" lvl="0" indent="0" algn="l">
               <a:lnSpc>
                 <a:spcPct val="90000"/>
               </a:lnSpc>
@@ -5806,7 +5389,7 @@
             </a:r>
           </a:p>
           <a:p>
-            <a:pPr lvl="0" marL="457200" indent="0" algn="l">
+            <a:pPr marL="457200" lvl="0" indent="0" algn="l">
               <a:lnSpc>
                 <a:spcPct val="90000"/>
               </a:lnSpc>
@@ -5824,7 +5407,7 @@
             </a:r>
           </a:p>
           <a:p>
-            <a:pPr lvl="0" marL="457200" indent="0" algn="l">
+            <a:pPr marL="457200" lvl="0" indent="0" algn="l">
               <a:lnSpc>
                 <a:spcPct val="90000"/>
               </a:lnSpc>
@@ -5844,13 +5427,9 @@
               <a:rPr lang="en-US" sz="2400" dirty="0" err="1"/>
               <a:t>Colab</a:t>
             </a:r>
-            <a:r>
-              <a:rPr lang="en-US" sz="2400" dirty="0"/>
-              <a:t/>
-            </a:r>
-          </a:p>
-          <a:p>
-            <a:pPr lvl="0" marL="457200" indent="0" algn="l">
+          </a:p>
+          <a:p>
+            <a:pPr marL="457200" lvl="0" indent="0" algn="l">
               <a:lnSpc>
                 <a:spcPct val="90000"/>
               </a:lnSpc>
@@ -6590,7 +6169,7 @@
           <a:p>
             <a:pPr algn="r"/>
             <a:fld id="{326EF2E3-409D-4D76-AD02-397A36B0DAF9}" type="slidenum">
-              <a:rPr lang="en-US" smtClean="0" sz="1600"/>
+              <a:rPr lang="en-US" sz="1600" smtClean="0"/>
               <a:t>6</a:t>
             </a:fld>
             <a:endParaRPr lang="en-US" sz="1600"/>
@@ -6834,7 +6413,7 @@
           <a:p>
             <a:pPr algn="r"/>
             <a:fld id="{326EF2E3-409D-4D76-AD02-397A36B0DAF9}" type="slidenum">
-              <a:rPr lang="en-US" smtClean="0" sz="1600"/>
+              <a:rPr lang="en-US" sz="1600" smtClean="0"/>
               <a:t>7</a:t>
             </a:fld>
             <a:endParaRPr lang="en-US" sz="1600"/>
@@ -6950,7 +6529,7 @@
           </a:bodyPr>
           <a:lstStyle/>
           <a:p>
-            <a:pPr lvl="0" marL="457200" indent="-457200" algn="l">
+            <a:pPr marL="457200" lvl="0" indent="-457200" algn="l">
               <a:lnSpc>
                 <a:spcPct val="100000"/>
               </a:lnSpc>
@@ -6969,7 +6548,7 @@
             </a:r>
           </a:p>
           <a:p>
-            <a:pPr lvl="0" marL="457200" indent="-457200" algn="l">
+            <a:pPr marL="457200" lvl="0" indent="-457200" algn="l">
               <a:lnSpc>
                 <a:spcPct val="100000"/>
               </a:lnSpc>
@@ -6988,7 +6567,7 @@
             </a:r>
           </a:p>
           <a:p>
-            <a:pPr lvl="0" marL="457200" indent="-457200" algn="l">
+            <a:pPr marL="457200" lvl="0" indent="-457200" algn="l">
               <a:lnSpc>
                 <a:spcPct val="100000"/>
               </a:lnSpc>
@@ -7007,7 +6586,7 @@
             </a:r>
           </a:p>
           <a:p>
-            <a:pPr lvl="0" marL="457200" indent="-457200" algn="l">
+            <a:pPr marL="457200" lvl="0" indent="-457200" algn="l">
               <a:lnSpc>
                 <a:spcPct val="100000"/>
               </a:lnSpc>
@@ -7026,7 +6605,7 @@
             </a:r>
           </a:p>
           <a:p>
-            <a:pPr lvl="0" marL="457200" indent="-457200" algn="l">
+            <a:pPr marL="457200" lvl="0" indent="-457200" algn="l">
               <a:lnSpc>
                 <a:spcPct val="100000"/>
               </a:lnSpc>
@@ -7199,7 +6778,7 @@
           <a:p>
             <a:pPr algn="r"/>
             <a:fld id="{326EF2E3-409D-4D76-AD02-397A36B0DAF9}" type="slidenum">
-              <a:rPr lang="en-US" smtClean="0" sz="1600"/>
+              <a:rPr lang="en-US" sz="1600" smtClean="0"/>
               <a:t>8</a:t>
             </a:fld>
             <a:endParaRPr lang="en-US" sz="1600"/>

--- a/PPTs/REVIEW - 1.pptx
+++ b/PPTs/REVIEW - 1.pptx
@@ -145,35 +145,6 @@
     </p:ext>
   </p:extLst>
 </p:presentation>
-</file>
-
-<file path=ppt/changesInfos/changesInfo1.xml><?xml version="1.0" encoding="utf-8"?>
-<pc:chgInfo xmlns:a="http://schemas.openxmlformats.org/drawingml/2006/main" xmlns:r="http://schemas.openxmlformats.org/officeDocument/2006/relationships" xmlns:ac="http://schemas.microsoft.com/office/drawing/2013/main/command" xmlns:pc="http://schemas.microsoft.com/office/powerpoint/2013/main/command">
-  <pc:docChgLst>
-    <pc:chgData name="Manoj Reddy Tetala" userId="d0a499fca1df3751" providerId="LiveId" clId="{844F9A02-E604-4125-9813-311D2C5B92A5}"/>
-    <pc:docChg chg="modSld">
-      <pc:chgData name="Manoj Reddy Tetala" userId="d0a499fca1df3751" providerId="LiveId" clId="{844F9A02-E604-4125-9813-311D2C5B92A5}" dt="2026-10-02T03:31:48.308" v="1" actId="20577"/>
-      <pc:docMkLst>
-        <pc:docMk/>
-      </pc:docMkLst>
-      <pc:sldChg chg="modSp mod">
-        <pc:chgData name="Manoj Reddy Tetala" userId="d0a499fca1df3751" providerId="LiveId" clId="{844F9A02-E604-4125-9813-311D2C5B92A5}" dt="2026-10-02T03:31:48.308" v="1" actId="20577"/>
-        <pc:sldMkLst>
-          <pc:docMk/>
-          <pc:sldMk cId="0" sldId="268"/>
-        </pc:sldMkLst>
-        <pc:spChg chg="mod">
-          <ac:chgData name="Manoj Reddy Tetala" userId="d0a499fca1df3751" providerId="LiveId" clId="{844F9A02-E604-4125-9813-311D2C5B92A5}" dt="2026-10-02T03:31:48.308" v="1" actId="20577"/>
-          <ac:spMkLst>
-            <pc:docMk/>
-            <pc:sldMk cId="0" sldId="268"/>
-            <ac:spMk id="6" creationId="{980F0D27-279D-4552-AF33-4C278AD7478C}"/>
-          </ac:spMkLst>
-        </pc:spChg>
-      </pc:sldChg>
-    </pc:docChg>
-  </pc:docChgLst>
-</pc:chgInfo>
 </file>
 
 <file path=ppt/notesMasters/notesMaster1.xml><?xml version="1.0" encoding="utf-8"?>
@@ -4707,12 +4678,301 @@
           </a:p>
         </p:txBody>
       </p:sp>
+      <p:sp>
+        <p:nvSpPr>
+          <p:cNvPr id="5" name="TextBox 4">
+            <a:extLst>
+              <a:ext uri="{FF2B5EF4-FFF2-40B4-BE49-F238E27FC236}">
+                <a16:creationId xmlns:a16="http://schemas.microsoft.com/office/drawing/2014/main" id="{37624D9D-ADB9-0CA9-0FD6-743BC4F59B96}"/>
+              </a:ext>
+            </a:extLst>
+          </p:cNvPr>
+          <p:cNvSpPr txBox="1"/>
+          <p:nvPr/>
+        </p:nvSpPr>
+        <p:spPr>
+          <a:xfrm>
+            <a:off x="2915200" y="183000"/>
+            <a:ext cx="8800000" cy="769441"/>
+          </a:xfrm>
+          <a:prstGeom prst="rect">
+            <a:avLst/>
+          </a:prstGeom>
+          <a:noFill/>
+        </p:spPr>
+        <p:txBody>
+          <a:bodyPr wrap="square" rtlCol="0">
+            <a:spAutoFit/>
+          </a:bodyPr>
+          <a:lstStyle/>
+          <a:p>
+            <a:pPr marL="0" indent="0" algn="ctr">
+              <a:spcBef>
+                <a:spcPts val="0"/>
+              </a:spcBef>
+              <a:spcAft>
+                <a:spcPts val="0"/>
+              </a:spcAft>
+              <a:buNone/>
+            </a:pPr>
+            <a:r>
+              <a:rPr lang="en-IN" sz="4400" b="1" dirty="0">
+                <a:solidFill>
+                  <a:schemeClr val="accent2"/>
+                </a:solidFill>
+              </a:rPr>
+              <a:t>DATASET DETAILS</a:t>
+            </a:r>
+          </a:p>
+        </p:txBody>
+      </p:sp>
+      <p:sp>
+        <p:nvSpPr>
+          <p:cNvPr id="6" name="TextBox 5">
+            <a:extLst>
+              <a:ext uri="{FF2B5EF4-FFF2-40B4-BE49-F238E27FC236}">
+                <a16:creationId xmlns:a16="http://schemas.microsoft.com/office/drawing/2014/main" id="{980F0D27-279D-4552-AF33-4C278AD7478C}"/>
+              </a:ext>
+            </a:extLst>
+          </p:cNvPr>
+          <p:cNvSpPr txBox="1"/>
+          <p:nvPr/>
+        </p:nvSpPr>
+        <p:spPr>
+          <a:xfrm>
+            <a:off x="1000000" y="1450000"/>
+            <a:ext cx="12630400" cy="5791329"/>
+          </a:xfrm>
+          <a:prstGeom prst="rect">
+            <a:avLst/>
+          </a:prstGeom>
+          <a:noFill/>
+        </p:spPr>
+        <p:txBody>
+          <a:bodyPr wrap="square">
+            <a:spAutoFit/>
+          </a:bodyPr>
+          <a:lstStyle/>
+          <a:p>
+            <a:pPr marL="457200" lvl="0" indent="-457200" algn="l">
+              <a:lnSpc>
+                <a:spcPct val="100000"/>
+              </a:lnSpc>
+              <a:spcBef>
+                <a:spcPts val="0"/>
+              </a:spcBef>
+              <a:spcAft>
+                <a:spcPts val="1000"/>
+              </a:spcAft>
+              <a:buFont typeface="Wingdings" panose="05000000000000000000" pitchFamily="2" charset="2"/>
+              <a:buChar char="v"/>
+            </a:pPr>
+            <a:r>
+              <a:rPr lang="en-US" sz="2600" b="1" dirty="0"/>
+              <a:t>Dataset:</a:t>
+            </a:r>
+            <a:r>
+              <a:rPr lang="en-US" sz="2600" dirty="0"/>
+              <a:t> UPI Transactions 2024 Dataset (Kaggle)</a:t>
+            </a:r>
+          </a:p>
+          <a:p>
+            <a:pPr marL="457200" lvl="0" indent="-457200" algn="l">
+              <a:lnSpc>
+                <a:spcPct val="100000"/>
+              </a:lnSpc>
+              <a:spcBef>
+                <a:spcPts val="0"/>
+              </a:spcBef>
+              <a:spcAft>
+                <a:spcPts val="1000"/>
+              </a:spcAft>
+              <a:buFont typeface="Wingdings" panose="05000000000000000000" pitchFamily="2" charset="2"/>
+              <a:buChar char="v"/>
+            </a:pPr>
+            <a:r>
+              <a:rPr lang="en-US" sz="2600" b="1" dirty="0"/>
+              <a:t>Dataset Size:</a:t>
+            </a:r>
+            <a:r>
+              <a:rPr lang="en-US" sz="2600" dirty="0"/>
+              <a:t> Approximately </a:t>
+            </a:r>
+            <a:r>
+              <a:rPr lang="en-US" sz="2600" b="1" dirty="0"/>
+              <a:t>250,000 synthetic UPI transaction records</a:t>
+            </a:r>
+            <a:r>
+              <a:rPr lang="en-US" sz="2600" dirty="0"/>
+              <a:t> </a:t>
+            </a:r>
+            <a:r>
+              <a:rPr lang="en-US" sz="2600"/>
+              <a:t>with </a:t>
+            </a:r>
+            <a:r>
+              <a:rPr lang="en-US" sz="2600" b="1" dirty="0"/>
+              <a:t>2</a:t>
+            </a:r>
+            <a:r>
+              <a:rPr lang="en-US" sz="2600" b="1"/>
+              <a:t>7 </a:t>
+            </a:r>
+            <a:r>
+              <a:rPr lang="en-US" sz="2600" b="1" dirty="0"/>
+              <a:t>attributes</a:t>
+            </a:r>
+            <a:r>
+              <a:rPr lang="en-US" sz="2600" dirty="0"/>
+              <a:t>.</a:t>
+            </a:r>
+          </a:p>
+          <a:p>
+            <a:pPr marL="457200" lvl="0" indent="-457200" algn="l">
+              <a:lnSpc>
+                <a:spcPct val="100000"/>
+              </a:lnSpc>
+              <a:spcBef>
+                <a:spcPts val="0"/>
+              </a:spcBef>
+              <a:spcAft>
+                <a:spcPts val="1000"/>
+              </a:spcAft>
+              <a:buFont typeface="Wingdings" panose="05000000000000000000" pitchFamily="2" charset="2"/>
+              <a:buChar char="v"/>
+            </a:pPr>
+            <a:r>
+              <a:rPr lang="en-US" sz="2600" b="1" dirty="0"/>
+              <a:t>Transaction Details:</a:t>
+            </a:r>
+            <a:r>
+              <a:rPr lang="en-US" sz="2600" dirty="0"/>
+              <a:t> Transaction ID, Timestamp, Transaction Type, Merchant Category, Transaction Amount and Transaction Status.</a:t>
+            </a:r>
+          </a:p>
+          <a:p>
+            <a:pPr marL="457200" lvl="0" indent="-457200" algn="l">
+              <a:lnSpc>
+                <a:spcPct val="100000"/>
+              </a:lnSpc>
+              <a:spcBef>
+                <a:spcPts val="0"/>
+              </a:spcBef>
+              <a:spcAft>
+                <a:spcPts val="1000"/>
+              </a:spcAft>
+              <a:buFont typeface="Wingdings" panose="05000000000000000000" pitchFamily="2" charset="2"/>
+              <a:buChar char="v"/>
+            </a:pPr>
+            <a:r>
+              <a:rPr lang="en-US" sz="2600" b="1" dirty="0"/>
+              <a:t>Bank &amp; User Information:</a:t>
+            </a:r>
+            <a:r>
+              <a:rPr lang="en-US" sz="2600" dirty="0"/>
+              <a:t> Sender Bank, Receiver Bank, Sender State, Sender and Receiver Age Groups.</a:t>
+            </a:r>
+          </a:p>
+          <a:p>
+            <a:pPr marL="457200" lvl="0" indent="-457200" algn="l">
+              <a:lnSpc>
+                <a:spcPct val="100000"/>
+              </a:lnSpc>
+              <a:spcBef>
+                <a:spcPts val="0"/>
+              </a:spcBef>
+              <a:spcAft>
+                <a:spcPts val="1000"/>
+              </a:spcAft>
+              <a:buFont typeface="Wingdings" panose="05000000000000000000" pitchFamily="2" charset="2"/>
+              <a:buChar char="v"/>
+            </a:pPr>
+            <a:r>
+              <a:rPr lang="en-US" sz="2600" b="1" dirty="0"/>
+              <a:t>Technology Details:</a:t>
+            </a:r>
+            <a:r>
+              <a:rPr lang="en-US" sz="2600" dirty="0"/>
+              <a:t> Device Type and Network Type used for transactions.</a:t>
+            </a:r>
+          </a:p>
+          <a:p>
+            <a:pPr marL="457200" lvl="0" indent="-457200" algn="l">
+              <a:lnSpc>
+                <a:spcPct val="100000"/>
+              </a:lnSpc>
+              <a:spcBef>
+                <a:spcPts val="0"/>
+              </a:spcBef>
+              <a:spcAft>
+                <a:spcPts val="1000"/>
+              </a:spcAft>
+              <a:buFont typeface="Wingdings" panose="05000000000000000000" pitchFamily="2" charset="2"/>
+              <a:buChar char="v"/>
+            </a:pPr>
+            <a:r>
+              <a:rPr lang="en-US" sz="2600" b="1" dirty="0"/>
+              <a:t>Fraud Information:</a:t>
+            </a:r>
+            <a:r>
+              <a:rPr lang="en-US" sz="2600" dirty="0"/>
+              <a:t> Fraud Flag identifying potentially fraudulent transactions.</a:t>
+            </a:r>
+          </a:p>
+          <a:p>
+            <a:pPr marL="457200" lvl="0" indent="-457200" algn="l">
+              <a:lnSpc>
+                <a:spcPct val="100000"/>
+              </a:lnSpc>
+              <a:spcBef>
+                <a:spcPts val="0"/>
+              </a:spcBef>
+              <a:spcAft>
+                <a:spcPts val="1000"/>
+              </a:spcAft>
+              <a:buFont typeface="Wingdings" panose="05000000000000000000" pitchFamily="2" charset="2"/>
+              <a:buChar char="v"/>
+            </a:pPr>
+            <a:r>
+              <a:rPr lang="en-US" sz="2600" b="1" dirty="0"/>
+              <a:t>Time-Based Features:</a:t>
+            </a:r>
+            <a:r>
+              <a:rPr lang="en-US" sz="2600" dirty="0"/>
+              <a:t> Transaction Hour, Day of Week and Weekend Indicator.</a:t>
+            </a:r>
+          </a:p>
+          <a:p>
+            <a:pPr marL="457200" lvl="0" indent="-457200" algn="l">
+              <a:lnSpc>
+                <a:spcPct val="100000"/>
+              </a:lnSpc>
+              <a:spcBef>
+                <a:spcPts val="0"/>
+              </a:spcBef>
+              <a:spcAft>
+                <a:spcPts val="1000"/>
+              </a:spcAft>
+              <a:buFont typeface="Wingdings" panose="05000000000000000000" pitchFamily="2" charset="2"/>
+              <a:buChar char="v"/>
+            </a:pPr>
+            <a:r>
+              <a:rPr lang="en-US" sz="2600" b="1" dirty="0"/>
+              <a:t>Purpose:</a:t>
+            </a:r>
+            <a:r>
+              <a:rPr lang="en-US" sz="2600" dirty="0"/>
+              <a:t> Suitable for customer spending analysis, transaction pattern analysis, fraud analysis, and business insight generation.</a:t>
+            </a:r>
+          </a:p>
+        </p:txBody>
+      </p:sp>
       <p:pic>
         <p:nvPicPr>
-          <p:cNvPr id="40" name="Picture 39">
+          <p:cNvPr id="4" name="Picture 3">
             <a:extLst>
               <a:ext uri="{FF2B5EF4-FFF2-40B4-BE49-F238E27FC236}">
-                <a16:creationId xmlns:a16="http://schemas.microsoft.com/office/drawing/2014/main" id="{CB1C515D-E08C-B48F-D9FC-A01A6DB8FA56}"/>
+                <a16:creationId xmlns:a16="http://schemas.microsoft.com/office/drawing/2014/main" id="{8184E000-B883-8D87-AFE8-1CF8AA7B62C4}"/>
               </a:ext>
             </a:extLst>
           </p:cNvPr>
@@ -4735,303 +4995,14 @@
         </p:blipFill>
         <p:spPr>
           <a:xfrm>
-            <a:off x="175881" y="148544"/>
-            <a:ext cx="2265925" cy="841629"/>
+            <a:off x="175882" y="148545"/>
+            <a:ext cx="2237298" cy="830996"/>
           </a:xfrm>
           <a:prstGeom prst="rect">
             <a:avLst/>
           </a:prstGeom>
         </p:spPr>
       </p:pic>
-      <p:sp>
-        <p:nvSpPr>
-          <p:cNvPr id="5" name="TextBox 4">
-            <a:extLst>
-              <a:ext uri="{FF2B5EF4-FFF2-40B4-BE49-F238E27FC236}">
-                <a16:creationId xmlns:a16="http://schemas.microsoft.com/office/drawing/2014/main" id="{37624D9D-ADB9-0CA9-0FD6-743BC4F59B96}"/>
-              </a:ext>
-            </a:extLst>
-          </p:cNvPr>
-          <p:cNvSpPr txBox="1"/>
-          <p:nvPr/>
-        </p:nvSpPr>
-        <p:spPr>
-          <a:xfrm>
-            <a:off x="2915200" y="183000"/>
-            <a:ext cx="8800000" cy="769441"/>
-          </a:xfrm>
-          <a:prstGeom prst="rect">
-            <a:avLst/>
-          </a:prstGeom>
-          <a:noFill/>
-        </p:spPr>
-        <p:txBody>
-          <a:bodyPr wrap="square" rtlCol="0">
-            <a:spAutoFit/>
-          </a:bodyPr>
-          <a:lstStyle/>
-          <a:p>
-            <a:pPr marL="0" indent="0" algn="ctr">
-              <a:spcBef>
-                <a:spcPts val="0"/>
-              </a:spcBef>
-              <a:spcAft>
-                <a:spcPts val="0"/>
-              </a:spcAft>
-              <a:buNone/>
-            </a:pPr>
-            <a:r>
-              <a:rPr lang="en-IN" sz="4400" b="1" dirty="0">
-                <a:solidFill>
-                  <a:schemeClr val="accent2"/>
-                </a:solidFill>
-              </a:rPr>
-              <a:t>DATASET DETAILS</a:t>
-            </a:r>
-          </a:p>
-        </p:txBody>
-      </p:sp>
-      <p:sp>
-        <p:nvSpPr>
-          <p:cNvPr id="6" name="TextBox 5">
-            <a:extLst>
-              <a:ext uri="{FF2B5EF4-FFF2-40B4-BE49-F238E27FC236}">
-                <a16:creationId xmlns:a16="http://schemas.microsoft.com/office/drawing/2014/main" id="{980F0D27-279D-4552-AF33-4C278AD7478C}"/>
-              </a:ext>
-            </a:extLst>
-          </p:cNvPr>
-          <p:cNvSpPr txBox="1"/>
-          <p:nvPr/>
-        </p:nvSpPr>
-        <p:spPr>
-          <a:xfrm>
-            <a:off x="1000000" y="1450000"/>
-            <a:ext cx="12630400" cy="5791329"/>
-          </a:xfrm>
-          <a:prstGeom prst="rect">
-            <a:avLst/>
-          </a:prstGeom>
-          <a:noFill/>
-        </p:spPr>
-        <p:txBody>
-          <a:bodyPr wrap="square">
-            <a:spAutoFit/>
-          </a:bodyPr>
-          <a:lstStyle/>
-          <a:p>
-            <a:pPr marL="457200" lvl="0" indent="-457200" algn="l">
-              <a:lnSpc>
-                <a:spcPct val="100000"/>
-              </a:lnSpc>
-              <a:spcBef>
-                <a:spcPts val="0"/>
-              </a:spcBef>
-              <a:spcAft>
-                <a:spcPts val="1000"/>
-              </a:spcAft>
-              <a:buFont typeface="Wingdings" panose="05000000000000000000" pitchFamily="2" charset="2"/>
-              <a:buChar char="v"/>
-            </a:pPr>
-            <a:r>
-              <a:rPr lang="en-US" sz="2600" b="1" dirty="0"/>
-              <a:t>Dataset:</a:t>
-            </a:r>
-            <a:r>
-              <a:rPr lang="en-US" sz="2600" dirty="0"/>
-              <a:t> UPI Transactions 2024 Dataset (Kaggle)</a:t>
-            </a:r>
-          </a:p>
-          <a:p>
-            <a:pPr marL="457200" lvl="0" indent="-457200" algn="l">
-              <a:lnSpc>
-                <a:spcPct val="100000"/>
-              </a:lnSpc>
-              <a:spcBef>
-                <a:spcPts val="0"/>
-              </a:spcBef>
-              <a:spcAft>
-                <a:spcPts val="1000"/>
-              </a:spcAft>
-              <a:buFont typeface="Wingdings" panose="05000000000000000000" pitchFamily="2" charset="2"/>
-              <a:buChar char="v"/>
-            </a:pPr>
-            <a:r>
-              <a:rPr lang="en-US" sz="2600" b="1" dirty="0"/>
-              <a:t>Dataset Size:</a:t>
-            </a:r>
-            <a:r>
-              <a:rPr lang="en-US" sz="2600" dirty="0"/>
-              <a:t> Approximately </a:t>
-            </a:r>
-            <a:r>
-              <a:rPr lang="en-US" sz="2600" b="1" dirty="0"/>
-              <a:t>250,000 synthetic UPI transaction records</a:t>
-            </a:r>
-            <a:r>
-              <a:rPr lang="en-US" sz="2600" dirty="0"/>
-              <a:t> </a:t>
-            </a:r>
-            <a:r>
-              <a:rPr lang="en-US" sz="2600"/>
-              <a:t>with </a:t>
-            </a:r>
-            <a:r>
-              <a:rPr lang="en-US" sz="2600" b="1" dirty="0"/>
-              <a:t>2</a:t>
-            </a:r>
-            <a:r>
-              <a:rPr lang="en-US" sz="2600" b="1"/>
-              <a:t>7 </a:t>
-            </a:r>
-            <a:r>
-              <a:rPr lang="en-US" sz="2600" b="1" dirty="0"/>
-              <a:t>attributes</a:t>
-            </a:r>
-            <a:r>
-              <a:rPr lang="en-US" sz="2600" dirty="0"/>
-              <a:t>.</a:t>
-            </a:r>
-          </a:p>
-          <a:p>
-            <a:pPr marL="457200" lvl="0" indent="-457200" algn="l">
-              <a:lnSpc>
-                <a:spcPct val="100000"/>
-              </a:lnSpc>
-              <a:spcBef>
-                <a:spcPts val="0"/>
-              </a:spcBef>
-              <a:spcAft>
-                <a:spcPts val="1000"/>
-              </a:spcAft>
-              <a:buFont typeface="Wingdings" panose="05000000000000000000" pitchFamily="2" charset="2"/>
-              <a:buChar char="v"/>
-            </a:pPr>
-            <a:r>
-              <a:rPr lang="en-US" sz="2600" b="1" dirty="0"/>
-              <a:t>Transaction Details:</a:t>
-            </a:r>
-            <a:r>
-              <a:rPr lang="en-US" sz="2600" dirty="0"/>
-              <a:t> Transaction ID, Timestamp, Transaction Type, Merchant Category, Transaction Amount and Transaction Status.</a:t>
-            </a:r>
-          </a:p>
-          <a:p>
-            <a:pPr marL="457200" lvl="0" indent="-457200" algn="l">
-              <a:lnSpc>
-                <a:spcPct val="100000"/>
-              </a:lnSpc>
-              <a:spcBef>
-                <a:spcPts val="0"/>
-              </a:spcBef>
-              <a:spcAft>
-                <a:spcPts val="1000"/>
-              </a:spcAft>
-              <a:buFont typeface="Wingdings" panose="05000000000000000000" pitchFamily="2" charset="2"/>
-              <a:buChar char="v"/>
-            </a:pPr>
-            <a:r>
-              <a:rPr lang="en-US" sz="2600" b="1" dirty="0"/>
-              <a:t>Bank &amp; User Information:</a:t>
-            </a:r>
-            <a:r>
-              <a:rPr lang="en-US" sz="2600" dirty="0"/>
-              <a:t> Sender Bank, Receiver Bank, Sender State, Sender and Receiver Age Groups.</a:t>
-            </a:r>
-          </a:p>
-          <a:p>
-            <a:pPr marL="457200" lvl="0" indent="-457200" algn="l">
-              <a:lnSpc>
-                <a:spcPct val="100000"/>
-              </a:lnSpc>
-              <a:spcBef>
-                <a:spcPts val="0"/>
-              </a:spcBef>
-              <a:spcAft>
-                <a:spcPts val="1000"/>
-              </a:spcAft>
-              <a:buFont typeface="Wingdings" panose="05000000000000000000" pitchFamily="2" charset="2"/>
-              <a:buChar char="v"/>
-            </a:pPr>
-            <a:r>
-              <a:rPr lang="en-US" sz="2600" b="1" dirty="0"/>
-              <a:t>Technology Details:</a:t>
-            </a:r>
-            <a:r>
-              <a:rPr lang="en-US" sz="2600" dirty="0"/>
-              <a:t> Device Type and Network Type used for transactions.</a:t>
-            </a:r>
-          </a:p>
-          <a:p>
-            <a:pPr marL="457200" lvl="0" indent="-457200" algn="l">
-              <a:lnSpc>
-                <a:spcPct val="100000"/>
-              </a:lnSpc>
-              <a:spcBef>
-                <a:spcPts val="0"/>
-              </a:spcBef>
-              <a:spcAft>
-                <a:spcPts val="1000"/>
-              </a:spcAft>
-              <a:buFont typeface="Wingdings" panose="05000000000000000000" pitchFamily="2" charset="2"/>
-              <a:buChar char="v"/>
-            </a:pPr>
-            <a:r>
-              <a:rPr lang="en-US" sz="2600" b="1" dirty="0"/>
-              <a:t>Fraud Information:</a:t>
-            </a:r>
-            <a:r>
-              <a:rPr lang="en-US" sz="2600" dirty="0"/>
-              <a:t> Fraud Flag identifying potentially fraudulent transactions.</a:t>
-            </a:r>
-          </a:p>
-          <a:p>
-            <a:pPr marL="457200" lvl="0" indent="-457200" algn="l">
-              <a:lnSpc>
-                <a:spcPct val="100000"/>
-              </a:lnSpc>
-              <a:spcBef>
-                <a:spcPts val="0"/>
-              </a:spcBef>
-              <a:spcAft>
-                <a:spcPts val="1000"/>
-              </a:spcAft>
-              <a:buFont typeface="Wingdings" panose="05000000000000000000" pitchFamily="2" charset="2"/>
-              <a:buChar char="v"/>
-            </a:pPr>
-            <a:r>
-              <a:rPr lang="en-US" sz="2600" b="1" dirty="0"/>
-              <a:t>Time-Based Features:</a:t>
-            </a:r>
-            <a:r>
-              <a:rPr lang="en-US" sz="2600" dirty="0"/>
-              <a:t> Transaction Hour, Day of Week and Weekend Indicator.</a:t>
-            </a:r>
-          </a:p>
-          <a:p>
-            <a:pPr marL="457200" lvl="0" indent="-457200" algn="l">
-              <a:lnSpc>
-                <a:spcPct val="100000"/>
-              </a:lnSpc>
-              <a:spcBef>
-                <a:spcPts val="0"/>
-              </a:spcBef>
-              <a:spcAft>
-                <a:spcPts val="1000"/>
-              </a:spcAft>
-              <a:buFont typeface="Wingdings" panose="05000000000000000000" pitchFamily="2" charset="2"/>
-              <a:buChar char="v"/>
-            </a:pPr>
-            <a:r>
-              <a:rPr lang="en-US" sz="2600" b="1" dirty="0"/>
-              <a:t>Purpose:</a:t>
-            </a:r>
-            <a:r>
-              <a:rPr lang="en-US" sz="2600" dirty="0"/>
-              <a:t> Suitable for customer spending analysis, transaction pattern analysis, fraud analysis, and business insight generation.</a:t>
-            </a:r>
-          </a:p>
-        </p:txBody>
-      </p:sp>
     </p:spTree>
   </p:cSld>
   <p:clrMapOvr>
@@ -5561,6 +5532,42 @@
           </a:p>
         </p:txBody>
       </p:sp>
+      <p:pic>
+        <p:nvPicPr>
+          <p:cNvPr id="3" name="Picture 2">
+            <a:extLst>
+              <a:ext uri="{FF2B5EF4-FFF2-40B4-BE49-F238E27FC236}">
+                <a16:creationId xmlns:a16="http://schemas.microsoft.com/office/drawing/2014/main" id="{E3B800CB-DA14-AF2F-8D66-B01EB5A98242}"/>
+              </a:ext>
+            </a:extLst>
+          </p:cNvPr>
+          <p:cNvPicPr>
+            <a:picLocks noChangeAspect="1"/>
+          </p:cNvPicPr>
+          <p:nvPr/>
+        </p:nvPicPr>
+        <p:blipFill>
+          <a:blip r:embed="rId2">
+            <a:extLst>
+              <a:ext uri="{28A0092B-C50C-407E-A947-70E740481C1C}">
+                <a14:useLocalDpi xmlns:a14="http://schemas.microsoft.com/office/drawing/2010/main" val="0"/>
+              </a:ext>
+            </a:extLst>
+          </a:blip>
+          <a:stretch>
+            <a:fillRect/>
+          </a:stretch>
+        </p:blipFill>
+        <p:spPr>
+          <a:xfrm>
+            <a:off x="175882" y="148545"/>
+            <a:ext cx="2237298" cy="830996"/>
+          </a:xfrm>
+          <a:prstGeom prst="rect">
+            <a:avLst/>
+          </a:prstGeom>
+        </p:spPr>
+      </p:pic>
     </p:spTree>
   </p:cSld>
   <p:clrMapOvr>
@@ -6254,12 +6261,347 @@
           <a:chExt cx="0" cy="0"/>
         </a:xfrm>
       </p:grpSpPr>
+      <p:sp>
+        <p:nvSpPr>
+          <p:cNvPr id="2" name="Slide Number Placeholder 3">
+            <a:extLst>
+              <a:ext uri="{FF2B5EF4-FFF2-40B4-BE49-F238E27FC236}">
+                <a16:creationId xmlns:a16="http://schemas.microsoft.com/office/drawing/2014/main" id="{9ADCD8D1-1D68-85AB-79C7-6AB5E6487B0C}"/>
+              </a:ext>
+            </a:extLst>
+          </p:cNvPr>
+          <p:cNvSpPr txBox="1">
+            <a:spLocks/>
+          </p:cNvSpPr>
+          <p:nvPr/>
+        </p:nvSpPr>
+        <p:spPr>
+          <a:xfrm>
+            <a:off x="12549064" y="7650000"/>
+            <a:ext cx="1081336" cy="365125"/>
+          </a:xfrm>
+          <a:prstGeom prst="rect">
+            <a:avLst/>
+          </a:prstGeom>
+        </p:spPr>
+        <p:txBody>
+          <a:bodyPr/>
+          <a:lstStyle>
+            <a:defPPr>
+              <a:defRPr lang="en-US"/>
+            </a:defPPr>
+            <a:lvl1pPr marL="0" algn="l" defTabSz="914400" rtl="0" eaLnBrk="1" latinLnBrk="0" hangingPunct="1">
+              <a:defRPr sz="1800" kern="1200">
+                <a:solidFill>
+                  <a:schemeClr val="tx1"/>
+                </a:solidFill>
+                <a:latin typeface="+mn-lt"/>
+                <a:ea typeface="+mn-ea"/>
+                <a:cs typeface="+mn-cs"/>
+              </a:defRPr>
+            </a:lvl1pPr>
+            <a:lvl2pPr marL="457200" algn="l" defTabSz="914400" rtl="0" eaLnBrk="1" latinLnBrk="0" hangingPunct="1">
+              <a:defRPr sz="1800" kern="1200">
+                <a:solidFill>
+                  <a:schemeClr val="tx1"/>
+                </a:solidFill>
+                <a:latin typeface="+mn-lt"/>
+                <a:ea typeface="+mn-ea"/>
+                <a:cs typeface="+mn-cs"/>
+              </a:defRPr>
+            </a:lvl2pPr>
+            <a:lvl3pPr marL="914400" algn="l" defTabSz="914400" rtl="0" eaLnBrk="1" latinLnBrk="0" hangingPunct="1">
+              <a:defRPr sz="1800" kern="1200">
+                <a:solidFill>
+                  <a:schemeClr val="tx1"/>
+                </a:solidFill>
+                <a:latin typeface="+mn-lt"/>
+                <a:ea typeface="+mn-ea"/>
+                <a:cs typeface="+mn-cs"/>
+              </a:defRPr>
+            </a:lvl3pPr>
+            <a:lvl4pPr marL="1371600" algn="l" defTabSz="914400" rtl="0" eaLnBrk="1" latinLnBrk="0" hangingPunct="1">
+              <a:defRPr sz="1800" kern="1200">
+                <a:solidFill>
+                  <a:schemeClr val="tx1"/>
+                </a:solidFill>
+                <a:latin typeface="+mn-lt"/>
+                <a:ea typeface="+mn-ea"/>
+                <a:cs typeface="+mn-cs"/>
+              </a:defRPr>
+            </a:lvl4pPr>
+            <a:lvl5pPr marL="1828800" algn="l" defTabSz="914400" rtl="0" eaLnBrk="1" latinLnBrk="0" hangingPunct="1">
+              <a:defRPr sz="1800" kern="1200">
+                <a:solidFill>
+                  <a:schemeClr val="tx1"/>
+                </a:solidFill>
+                <a:latin typeface="+mn-lt"/>
+                <a:ea typeface="+mn-ea"/>
+                <a:cs typeface="+mn-cs"/>
+              </a:defRPr>
+            </a:lvl5pPr>
+            <a:lvl6pPr marL="2286000" algn="l" defTabSz="914400" rtl="0" eaLnBrk="1" latinLnBrk="0" hangingPunct="1">
+              <a:defRPr sz="1800" kern="1200">
+                <a:solidFill>
+                  <a:schemeClr val="tx1"/>
+                </a:solidFill>
+                <a:latin typeface="+mn-lt"/>
+                <a:ea typeface="+mn-ea"/>
+                <a:cs typeface="+mn-cs"/>
+              </a:defRPr>
+            </a:lvl6pPr>
+            <a:lvl7pPr marL="2743200" algn="l" defTabSz="914400" rtl="0" eaLnBrk="1" latinLnBrk="0" hangingPunct="1">
+              <a:defRPr sz="1800" kern="1200">
+                <a:solidFill>
+                  <a:schemeClr val="tx1"/>
+                </a:solidFill>
+                <a:latin typeface="+mn-lt"/>
+                <a:ea typeface="+mn-ea"/>
+                <a:cs typeface="+mn-cs"/>
+              </a:defRPr>
+            </a:lvl7pPr>
+            <a:lvl8pPr marL="3200400" algn="l" defTabSz="914400" rtl="0" eaLnBrk="1" latinLnBrk="0" hangingPunct="1">
+              <a:defRPr sz="1800" kern="1200">
+                <a:solidFill>
+                  <a:schemeClr val="tx1"/>
+                </a:solidFill>
+                <a:latin typeface="+mn-lt"/>
+                <a:ea typeface="+mn-ea"/>
+                <a:cs typeface="+mn-cs"/>
+              </a:defRPr>
+            </a:lvl8pPr>
+            <a:lvl9pPr marL="3657600" algn="l" defTabSz="914400" rtl="0" eaLnBrk="1" latinLnBrk="0" hangingPunct="1">
+              <a:defRPr sz="1800" kern="1200">
+                <a:solidFill>
+                  <a:schemeClr val="tx1"/>
+                </a:solidFill>
+                <a:latin typeface="+mn-lt"/>
+                <a:ea typeface="+mn-ea"/>
+                <a:cs typeface="+mn-cs"/>
+              </a:defRPr>
+            </a:lvl9pPr>
+          </a:lstStyle>
+          <a:p>
+            <a:pPr algn="r"/>
+            <a:fld id="{326EF2E3-409D-4D76-AD02-397A36B0DAF9}" type="slidenum">
+              <a:rPr lang="en-US" sz="1600" smtClean="0"/>
+              <a:t>7</a:t>
+            </a:fld>
+            <a:endParaRPr lang="en-US" sz="1600"/>
+          </a:p>
+        </p:txBody>
+      </p:sp>
+      <p:sp>
+        <p:nvSpPr>
+          <p:cNvPr id="4" name="TextBox 3">
+            <a:extLst>
+              <a:ext uri="{FF2B5EF4-FFF2-40B4-BE49-F238E27FC236}">
+                <a16:creationId xmlns:a16="http://schemas.microsoft.com/office/drawing/2014/main" id="{DC9C4988-CFA1-7968-90BF-933AC73035AC}"/>
+              </a:ext>
+            </a:extLst>
+          </p:cNvPr>
+          <p:cNvSpPr txBox="1"/>
+          <p:nvPr/>
+        </p:nvSpPr>
+        <p:spPr>
+          <a:xfrm>
+            <a:off x="2915200" y="183000"/>
+            <a:ext cx="8800000" cy="769441"/>
+          </a:xfrm>
+          <a:prstGeom prst="rect">
+            <a:avLst/>
+          </a:prstGeom>
+          <a:noFill/>
+        </p:spPr>
+        <p:txBody>
+          <a:bodyPr wrap="square" rtlCol="0">
+            <a:spAutoFit/>
+          </a:bodyPr>
+          <a:lstStyle/>
+          <a:p>
+            <a:pPr marL="0" indent="0" algn="ctr">
+              <a:spcBef>
+                <a:spcPts val="0"/>
+              </a:spcBef>
+              <a:spcAft>
+                <a:spcPts val="0"/>
+              </a:spcAft>
+              <a:buNone/>
+            </a:pPr>
+            <a:r>
+              <a:rPr lang="en-IN" sz="4400" b="1" dirty="0">
+                <a:solidFill>
+                  <a:srgbClr val="7030A0"/>
+                </a:solidFill>
+              </a:rPr>
+              <a:t>Future Enhancements</a:t>
+            </a:r>
+            <a:endParaRPr lang="en-IN" sz="4400" b="1" dirty="0"/>
+          </a:p>
+        </p:txBody>
+      </p:sp>
+      <p:sp>
+        <p:nvSpPr>
+          <p:cNvPr id="5" name="TextBox 4">
+            <a:extLst>
+              <a:ext uri="{FF2B5EF4-FFF2-40B4-BE49-F238E27FC236}">
+                <a16:creationId xmlns:a16="http://schemas.microsoft.com/office/drawing/2014/main" id="{92407366-03FE-F24A-BCA8-118473041035}"/>
+              </a:ext>
+            </a:extLst>
+          </p:cNvPr>
+          <p:cNvSpPr txBox="1"/>
+          <p:nvPr/>
+        </p:nvSpPr>
+        <p:spPr>
+          <a:xfrm>
+            <a:off x="1194912" y="3848692"/>
+            <a:ext cx="272652" cy="400110"/>
+          </a:xfrm>
+          <a:prstGeom prst="rect">
+            <a:avLst/>
+          </a:prstGeom>
+          <a:noFill/>
+        </p:spPr>
+        <p:txBody>
+          <a:bodyPr wrap="square">
+            <a:spAutoFit/>
+          </a:bodyPr>
+          <a:lstStyle/>
+          <a:p>
+            <a:endParaRPr lang="en-IN" sz="2000" dirty="0"/>
+          </a:p>
+        </p:txBody>
+      </p:sp>
+      <p:sp>
+        <p:nvSpPr>
+          <p:cNvPr id="8" name="TextBox 7">
+            <a:extLst>
+              <a:ext uri="{FF2B5EF4-FFF2-40B4-BE49-F238E27FC236}">
+                <a16:creationId xmlns:a16="http://schemas.microsoft.com/office/drawing/2014/main" id="{859540C1-42E6-397C-FEC1-D30A132585EB}"/>
+              </a:ext>
+            </a:extLst>
+          </p:cNvPr>
+          <p:cNvSpPr txBox="1"/>
+          <p:nvPr/>
+        </p:nvSpPr>
+        <p:spPr>
+          <a:xfrm>
+            <a:off x="1000000" y="1450000"/>
+            <a:ext cx="12630400" cy="4000000"/>
+          </a:xfrm>
+          <a:prstGeom prst="rect">
+            <a:avLst/>
+          </a:prstGeom>
+          <a:noFill/>
+        </p:spPr>
+        <p:txBody>
+          <a:bodyPr wrap="square">
+            <a:spAutoFit/>
+          </a:bodyPr>
+          <a:lstStyle/>
+          <a:p>
+            <a:pPr marL="457200" lvl="0" indent="-457200" algn="l">
+              <a:lnSpc>
+                <a:spcPct val="100000"/>
+              </a:lnSpc>
+              <a:spcBef>
+                <a:spcPts val="0"/>
+              </a:spcBef>
+              <a:spcAft>
+                <a:spcPts val="2000"/>
+              </a:spcAft>
+              <a:buFont typeface="Wingdings" panose="05000000000000000000" pitchFamily="2" charset="2"/>
+              <a:buChar char="v"/>
+            </a:pPr>
+            <a:r>
+              <a:rPr lang="en-US" sz="3000" dirty="0"/>
+              <a:t>Develop an interactive Power BI dashboard for transaction analysis.</a:t>
+            </a:r>
+          </a:p>
+          <a:p>
+            <a:pPr marL="457200" lvl="0" indent="-457200" algn="l">
+              <a:lnSpc>
+                <a:spcPct val="100000"/>
+              </a:lnSpc>
+              <a:spcBef>
+                <a:spcPts val="0"/>
+              </a:spcBef>
+              <a:spcAft>
+                <a:spcPts val="2000"/>
+              </a:spcAft>
+              <a:buFont typeface="Wingdings" panose="05000000000000000000" pitchFamily="2" charset="2"/>
+              <a:buChar char="v"/>
+            </a:pPr>
+            <a:r>
+              <a:rPr lang="en-US" sz="3000" dirty="0"/>
+              <a:t>Integrate real-time UPI transaction data using APIs.</a:t>
+            </a:r>
+          </a:p>
+          <a:p>
+            <a:pPr marL="457200" lvl="0" indent="-457200" algn="l">
+              <a:lnSpc>
+                <a:spcPct val="100000"/>
+              </a:lnSpc>
+              <a:spcBef>
+                <a:spcPts val="0"/>
+              </a:spcBef>
+              <a:spcAft>
+                <a:spcPts val="2000"/>
+              </a:spcAft>
+              <a:buFont typeface="Wingdings" panose="05000000000000000000" pitchFamily="2" charset="2"/>
+              <a:buChar char="v"/>
+            </a:pPr>
+            <a:r>
+              <a:rPr lang="en-US" sz="3000" dirty="0"/>
+              <a:t>Apply Machine Learning techniques for fraud prediction.</a:t>
+            </a:r>
+          </a:p>
+          <a:p>
+            <a:pPr marL="457200" lvl="0" indent="-457200" algn="l">
+              <a:lnSpc>
+                <a:spcPct val="100000"/>
+              </a:lnSpc>
+              <a:spcBef>
+                <a:spcPts val="0"/>
+              </a:spcBef>
+              <a:spcAft>
+                <a:spcPts val="2000"/>
+              </a:spcAft>
+              <a:buFont typeface="Wingdings" panose="05000000000000000000" pitchFamily="2" charset="2"/>
+              <a:buChar char="v"/>
+            </a:pPr>
+            <a:r>
+              <a:rPr lang="en-US" sz="3000" dirty="0"/>
+              <a:t>Perform predictive analysis on customer spending trends.</a:t>
+            </a:r>
+          </a:p>
+          <a:p>
+            <a:pPr marL="457200" lvl="0" indent="-457200" algn="l">
+              <a:lnSpc>
+                <a:spcPct val="100000"/>
+              </a:lnSpc>
+              <a:spcBef>
+                <a:spcPts val="0"/>
+              </a:spcBef>
+              <a:spcAft>
+                <a:spcPts val="2000"/>
+              </a:spcAft>
+              <a:buFont typeface="Wingdings" panose="05000000000000000000" pitchFamily="2" charset="2"/>
+              <a:buChar char="v"/>
+            </a:pPr>
+            <a:r>
+              <a:rPr lang="en-US" sz="3000" dirty="0"/>
+              <a:t>Enhance the project with advanced statistical analysis and business intelligence features.</a:t>
+            </a:r>
+          </a:p>
+        </p:txBody>
+      </p:sp>
       <p:pic>
         <p:nvPicPr>
-          <p:cNvPr id="3" name="Picture 2">
+          <p:cNvPr id="7" name="Picture 6">
             <a:extLst>
               <a:ext uri="{FF2B5EF4-FFF2-40B4-BE49-F238E27FC236}">
-                <a16:creationId xmlns:a16="http://schemas.microsoft.com/office/drawing/2014/main" id="{0698359C-577A-79A2-D8E1-10EB4125EE13}"/>
+                <a16:creationId xmlns:a16="http://schemas.microsoft.com/office/drawing/2014/main" id="{C376F2F3-53F2-3AEF-3385-180F77B08B93}"/>
               </a:ext>
             </a:extLst>
           </p:cNvPr>
@@ -6283,348 +6625,13 @@
         <p:spPr>
           <a:xfrm>
             <a:off x="175882" y="148545"/>
-            <a:ext cx="2122708" cy="788434"/>
+            <a:ext cx="2237298" cy="830996"/>
           </a:xfrm>
           <a:prstGeom prst="rect">
             <a:avLst/>
           </a:prstGeom>
         </p:spPr>
       </p:pic>
-      <p:sp>
-        <p:nvSpPr>
-          <p:cNvPr id="2" name="Slide Number Placeholder 3">
-            <a:extLst>
-              <a:ext uri="{FF2B5EF4-FFF2-40B4-BE49-F238E27FC236}">
-                <a16:creationId xmlns:a16="http://schemas.microsoft.com/office/drawing/2014/main" id="{9ADCD8D1-1D68-85AB-79C7-6AB5E6487B0C}"/>
-              </a:ext>
-            </a:extLst>
-          </p:cNvPr>
-          <p:cNvSpPr txBox="1">
-            <a:spLocks/>
-          </p:cNvSpPr>
-          <p:nvPr/>
-        </p:nvSpPr>
-        <p:spPr>
-          <a:xfrm>
-            <a:off x="12549064" y="7650000"/>
-            <a:ext cx="1081336" cy="365125"/>
-          </a:xfrm>
-          <a:prstGeom prst="rect">
-            <a:avLst/>
-          </a:prstGeom>
-        </p:spPr>
-        <p:txBody>
-          <a:bodyPr/>
-          <a:lstStyle>
-            <a:defPPr>
-              <a:defRPr lang="en-US"/>
-            </a:defPPr>
-            <a:lvl1pPr marL="0" algn="l" defTabSz="914400" rtl="0" eaLnBrk="1" latinLnBrk="0" hangingPunct="1">
-              <a:defRPr sz="1800" kern="1200">
-                <a:solidFill>
-                  <a:schemeClr val="tx1"/>
-                </a:solidFill>
-                <a:latin typeface="+mn-lt"/>
-                <a:ea typeface="+mn-ea"/>
-                <a:cs typeface="+mn-cs"/>
-              </a:defRPr>
-            </a:lvl1pPr>
-            <a:lvl2pPr marL="457200" algn="l" defTabSz="914400" rtl="0" eaLnBrk="1" latinLnBrk="0" hangingPunct="1">
-              <a:defRPr sz="1800" kern="1200">
-                <a:solidFill>
-                  <a:schemeClr val="tx1"/>
-                </a:solidFill>
-                <a:latin typeface="+mn-lt"/>
-                <a:ea typeface="+mn-ea"/>
-                <a:cs typeface="+mn-cs"/>
-              </a:defRPr>
-            </a:lvl2pPr>
-            <a:lvl3pPr marL="914400" algn="l" defTabSz="914400" rtl="0" eaLnBrk="1" latinLnBrk="0" hangingPunct="1">
-              <a:defRPr sz="1800" kern="1200">
-                <a:solidFill>
-                  <a:schemeClr val="tx1"/>
-                </a:solidFill>
-                <a:latin typeface="+mn-lt"/>
-                <a:ea typeface="+mn-ea"/>
-                <a:cs typeface="+mn-cs"/>
-              </a:defRPr>
-            </a:lvl3pPr>
-            <a:lvl4pPr marL="1371600" algn="l" defTabSz="914400" rtl="0" eaLnBrk="1" latinLnBrk="0" hangingPunct="1">
-              <a:defRPr sz="1800" kern="1200">
-                <a:solidFill>
-                  <a:schemeClr val="tx1"/>
-                </a:solidFill>
-                <a:latin typeface="+mn-lt"/>
-                <a:ea typeface="+mn-ea"/>
-                <a:cs typeface="+mn-cs"/>
-              </a:defRPr>
-            </a:lvl4pPr>
-            <a:lvl5pPr marL="1828800" algn="l" defTabSz="914400" rtl="0" eaLnBrk="1" latinLnBrk="0" hangingPunct="1">
-              <a:defRPr sz="1800" kern="1200">
-                <a:solidFill>
-                  <a:schemeClr val="tx1"/>
-                </a:solidFill>
-                <a:latin typeface="+mn-lt"/>
-                <a:ea typeface="+mn-ea"/>
-                <a:cs typeface="+mn-cs"/>
-              </a:defRPr>
-            </a:lvl5pPr>
-            <a:lvl6pPr marL="2286000" algn="l" defTabSz="914400" rtl="0" eaLnBrk="1" latinLnBrk="0" hangingPunct="1">
-              <a:defRPr sz="1800" kern="1200">
-                <a:solidFill>
-                  <a:schemeClr val="tx1"/>
-                </a:solidFill>
-                <a:latin typeface="+mn-lt"/>
-                <a:ea typeface="+mn-ea"/>
-                <a:cs typeface="+mn-cs"/>
-              </a:defRPr>
-            </a:lvl6pPr>
-            <a:lvl7pPr marL="2743200" algn="l" defTabSz="914400" rtl="0" eaLnBrk="1" latinLnBrk="0" hangingPunct="1">
-              <a:defRPr sz="1800" kern="1200">
-                <a:solidFill>
-                  <a:schemeClr val="tx1"/>
-                </a:solidFill>
-                <a:latin typeface="+mn-lt"/>
-                <a:ea typeface="+mn-ea"/>
-                <a:cs typeface="+mn-cs"/>
-              </a:defRPr>
-            </a:lvl7pPr>
-            <a:lvl8pPr marL="3200400" algn="l" defTabSz="914400" rtl="0" eaLnBrk="1" latinLnBrk="0" hangingPunct="1">
-              <a:defRPr sz="1800" kern="1200">
-                <a:solidFill>
-                  <a:schemeClr val="tx1"/>
-                </a:solidFill>
-                <a:latin typeface="+mn-lt"/>
-                <a:ea typeface="+mn-ea"/>
-                <a:cs typeface="+mn-cs"/>
-              </a:defRPr>
-            </a:lvl8pPr>
-            <a:lvl9pPr marL="3657600" algn="l" defTabSz="914400" rtl="0" eaLnBrk="1" latinLnBrk="0" hangingPunct="1">
-              <a:defRPr sz="1800" kern="1200">
-                <a:solidFill>
-                  <a:schemeClr val="tx1"/>
-                </a:solidFill>
-                <a:latin typeface="+mn-lt"/>
-                <a:ea typeface="+mn-ea"/>
-                <a:cs typeface="+mn-cs"/>
-              </a:defRPr>
-            </a:lvl9pPr>
-          </a:lstStyle>
-          <a:p>
-            <a:pPr algn="r"/>
-            <a:fld id="{326EF2E3-409D-4D76-AD02-397A36B0DAF9}" type="slidenum">
-              <a:rPr lang="en-US" sz="1600" smtClean="0"/>
-              <a:t>7</a:t>
-            </a:fld>
-            <a:endParaRPr lang="en-US" sz="1600"/>
-          </a:p>
-        </p:txBody>
-      </p:sp>
-      <p:sp>
-        <p:nvSpPr>
-          <p:cNvPr id="4" name="TextBox 3">
-            <a:extLst>
-              <a:ext uri="{FF2B5EF4-FFF2-40B4-BE49-F238E27FC236}">
-                <a16:creationId xmlns:a16="http://schemas.microsoft.com/office/drawing/2014/main" id="{DC9C4988-CFA1-7968-90BF-933AC73035AC}"/>
-              </a:ext>
-            </a:extLst>
-          </p:cNvPr>
-          <p:cNvSpPr txBox="1"/>
-          <p:nvPr/>
-        </p:nvSpPr>
-        <p:spPr>
-          <a:xfrm>
-            <a:off x="2915200" y="183000"/>
-            <a:ext cx="8800000" cy="769441"/>
-          </a:xfrm>
-          <a:prstGeom prst="rect">
-            <a:avLst/>
-          </a:prstGeom>
-          <a:noFill/>
-        </p:spPr>
-        <p:txBody>
-          <a:bodyPr wrap="square" rtlCol="0">
-            <a:spAutoFit/>
-          </a:bodyPr>
-          <a:lstStyle/>
-          <a:p>
-            <a:pPr marL="0" indent="0" algn="ctr">
-              <a:spcBef>
-                <a:spcPts val="0"/>
-              </a:spcBef>
-              <a:spcAft>
-                <a:spcPts val="0"/>
-              </a:spcAft>
-              <a:buNone/>
-            </a:pPr>
-            <a:r>
-              <a:rPr lang="en-IN" sz="4400" b="1" dirty="0">
-                <a:solidFill>
-                  <a:srgbClr val="7030A0"/>
-                </a:solidFill>
-              </a:rPr>
-              <a:t>Future Enhancements</a:t>
-            </a:r>
-            <a:endParaRPr lang="en-IN" sz="4400" b="1" dirty="0"/>
-          </a:p>
-        </p:txBody>
-      </p:sp>
-      <p:sp>
-        <p:nvSpPr>
-          <p:cNvPr id="5" name="TextBox 4">
-            <a:extLst>
-              <a:ext uri="{FF2B5EF4-FFF2-40B4-BE49-F238E27FC236}">
-                <a16:creationId xmlns:a16="http://schemas.microsoft.com/office/drawing/2014/main" id="{92407366-03FE-F24A-BCA8-118473041035}"/>
-              </a:ext>
-            </a:extLst>
-          </p:cNvPr>
-          <p:cNvSpPr txBox="1"/>
-          <p:nvPr/>
-        </p:nvSpPr>
-        <p:spPr>
-          <a:xfrm>
-            <a:off x="1194912" y="3848692"/>
-            <a:ext cx="272652" cy="400110"/>
-          </a:xfrm>
-          <a:prstGeom prst="rect">
-            <a:avLst/>
-          </a:prstGeom>
-          <a:noFill/>
-        </p:spPr>
-        <p:txBody>
-          <a:bodyPr wrap="square">
-            <a:spAutoFit/>
-          </a:bodyPr>
-          <a:lstStyle/>
-          <a:p>
-            <a:endParaRPr lang="en-IN" sz="2000" dirty="0"/>
-          </a:p>
-        </p:txBody>
-      </p:sp>
-      <p:sp>
-        <p:nvSpPr>
-          <p:cNvPr id="8" name="TextBox 7">
-            <a:extLst>
-              <a:ext uri="{FF2B5EF4-FFF2-40B4-BE49-F238E27FC236}">
-                <a16:creationId xmlns:a16="http://schemas.microsoft.com/office/drawing/2014/main" id="{859540C1-42E6-397C-FEC1-D30A132585EB}"/>
-              </a:ext>
-            </a:extLst>
-          </p:cNvPr>
-          <p:cNvSpPr txBox="1"/>
-          <p:nvPr/>
-        </p:nvSpPr>
-        <p:spPr>
-          <a:xfrm>
-            <a:off x="1000000" y="1450000"/>
-            <a:ext cx="12630400" cy="4000000"/>
-          </a:xfrm>
-          <a:prstGeom prst="rect">
-            <a:avLst/>
-          </a:prstGeom>
-          <a:noFill/>
-        </p:spPr>
-        <p:txBody>
-          <a:bodyPr wrap="square">
-            <a:spAutoFit/>
-          </a:bodyPr>
-          <a:lstStyle/>
-          <a:p>
-            <a:pPr marL="457200" lvl="0" indent="-457200" algn="l">
-              <a:lnSpc>
-                <a:spcPct val="100000"/>
-              </a:lnSpc>
-              <a:spcBef>
-                <a:spcPts val="0"/>
-              </a:spcBef>
-              <a:spcAft>
-                <a:spcPts val="2000"/>
-              </a:spcAft>
-              <a:buFont typeface="Wingdings" panose="05000000000000000000" pitchFamily="2" charset="2"/>
-              <a:buChar char="v"/>
-            </a:pPr>
-            <a:r>
-              <a:rPr lang="en-US" sz="3000" dirty="0"/>
-              <a:t>Develop an interactive Power BI dashboard for transaction analysis.</a:t>
-            </a:r>
-          </a:p>
-          <a:p>
-            <a:pPr marL="457200" lvl="0" indent="-457200" algn="l">
-              <a:lnSpc>
-                <a:spcPct val="100000"/>
-              </a:lnSpc>
-              <a:spcBef>
-                <a:spcPts val="0"/>
-              </a:spcBef>
-              <a:spcAft>
-                <a:spcPts val="2000"/>
-              </a:spcAft>
-              <a:buFont typeface="Wingdings" panose="05000000000000000000" pitchFamily="2" charset="2"/>
-              <a:buChar char="v"/>
-            </a:pPr>
-            <a:r>
-              <a:rPr lang="en-US" sz="3000" dirty="0"/>
-              <a:t>Integrate real-time UPI transaction data using APIs.</a:t>
-            </a:r>
-          </a:p>
-          <a:p>
-            <a:pPr marL="457200" lvl="0" indent="-457200" algn="l">
-              <a:lnSpc>
-                <a:spcPct val="100000"/>
-              </a:lnSpc>
-              <a:spcBef>
-                <a:spcPts val="0"/>
-              </a:spcBef>
-              <a:spcAft>
-                <a:spcPts val="2000"/>
-              </a:spcAft>
-              <a:buFont typeface="Wingdings" panose="05000000000000000000" pitchFamily="2" charset="2"/>
-              <a:buChar char="v"/>
-            </a:pPr>
-            <a:r>
-              <a:rPr lang="en-US" sz="3000" dirty="0"/>
-              <a:t>Apply Machine Learning techniques for fraud prediction.</a:t>
-            </a:r>
-          </a:p>
-          <a:p>
-            <a:pPr marL="457200" lvl="0" indent="-457200" algn="l">
-              <a:lnSpc>
-                <a:spcPct val="100000"/>
-              </a:lnSpc>
-              <a:spcBef>
-                <a:spcPts val="0"/>
-              </a:spcBef>
-              <a:spcAft>
-                <a:spcPts val="2000"/>
-              </a:spcAft>
-              <a:buFont typeface="Wingdings" panose="05000000000000000000" pitchFamily="2" charset="2"/>
-              <a:buChar char="v"/>
-            </a:pPr>
-            <a:r>
-              <a:rPr lang="en-US" sz="3000" dirty="0"/>
-              <a:t>Perform predictive analysis on customer spending trends.</a:t>
-            </a:r>
-          </a:p>
-          <a:p>
-            <a:pPr marL="457200" lvl="0" indent="-457200" algn="l">
-              <a:lnSpc>
-                <a:spcPct val="100000"/>
-              </a:lnSpc>
-              <a:spcBef>
-                <a:spcPts val="0"/>
-              </a:spcBef>
-              <a:spcAft>
-                <a:spcPts val="2000"/>
-              </a:spcAft>
-              <a:buFont typeface="Wingdings" panose="05000000000000000000" pitchFamily="2" charset="2"/>
-              <a:buChar char="v"/>
-            </a:pPr>
-            <a:r>
-              <a:rPr lang="en-US" sz="3000" dirty="0"/>
-              <a:t>Enhance the project with advanced statistical analysis and business intelligence features.</a:t>
-            </a:r>
-          </a:p>
-        </p:txBody>
-      </p:sp>
     </p:spTree>
     <p:extLst>
       <p:ext uri="{BB962C8B-B14F-4D97-AF65-F5344CB8AC3E}">
@@ -6889,6 +6896,42 @@
           </a:p>
         </p:txBody>
       </p:sp>
+      <p:pic>
+        <p:nvPicPr>
+          <p:cNvPr id="4" name="Picture 3">
+            <a:extLst>
+              <a:ext uri="{FF2B5EF4-FFF2-40B4-BE49-F238E27FC236}">
+                <a16:creationId xmlns:a16="http://schemas.microsoft.com/office/drawing/2014/main" id="{579AF1A8-2139-05EE-BFA0-EFBE9708B1C4}"/>
+              </a:ext>
+            </a:extLst>
+          </p:cNvPr>
+          <p:cNvPicPr>
+            <a:picLocks noChangeAspect="1"/>
+          </p:cNvPicPr>
+          <p:nvPr/>
+        </p:nvPicPr>
+        <p:blipFill>
+          <a:blip r:embed="rId2">
+            <a:extLst>
+              <a:ext uri="{28A0092B-C50C-407E-A947-70E740481C1C}">
+                <a14:useLocalDpi xmlns:a14="http://schemas.microsoft.com/office/drawing/2010/main" val="0"/>
+              </a:ext>
+            </a:extLst>
+          </a:blip>
+          <a:stretch>
+            <a:fillRect/>
+          </a:stretch>
+        </p:blipFill>
+        <p:spPr>
+          <a:xfrm>
+            <a:off x="175882" y="148545"/>
+            <a:ext cx="2237298" cy="830996"/>
+          </a:xfrm>
+          <a:prstGeom prst="rect">
+            <a:avLst/>
+          </a:prstGeom>
+        </p:spPr>
+      </p:pic>
     </p:spTree>
     <p:extLst>
       <p:ext uri="{BB962C8B-B14F-4D97-AF65-F5344CB8AC3E}">
